--- a/deliverable/中期答辩_最终版.pptx
+++ b/deliverable/中期答辩_最终版.pptx
@@ -1155,7 +1155,7 @@
           <a:lstStyle/>
           <a:p>
             <a:r>
-              <a:t>总结一下：主体分析工作已经在中期完成，剩余是机制关联的结论整理、抑菌实验验证和论文撰写，整体风险可控。我的汇报到此结束，请各位老师批评指正。</a:t>
+              <a:t>这页把抗菌肽与 AD 的关联拆成七环，并标出每一环的证据强度：蓝色是已有实验或临床证据，绿色是计算方法能给出候选与优先序的部分，橙色是本课题要回答或需要验证的部分。老师问任何一环，都能说清这一环目前的证据到什么程度。</a:t>
             </a:r>
           </a:p>
         </p:txBody>
@@ -1225,7 +1225,7 @@
           <a:lstStyle/>
           <a:p>
             <a:r>
-              <a:t>这页把抗菌肽与 AD 的关联拆成七环，并标出每一环的证据强度：蓝色是已有实验或临床证据，绿色是计算方法能给出候选与优先序的部分，橙色是本课题要回答或需要验证的部分。老师问任何一环，都能说清这一环目前的证据到什么程度。</a:t>
+              <a:t>为什么 AD 组更多？因为存在一个正反馈：菌群失衡与肠屏障通透性增加使内毒素长期刺激宿主，经 TLR4 与 NF-κB 通路升高促炎因子，促炎因子又上调 Aβ 与抗菌肽的生成；聚集后的 Aβ 激活小胶质细胞产生更多炎症介质，循环自我加强。这也是抗菌保护假说的现代表述。</a:t>
             </a:r>
           </a:p>
         </p:txBody>
@@ -1365,7 +1365,7 @@
           <a:lstStyle/>
           <a:p>
             <a:r>
-              <a:t>为什么 AD 组更多？因为存在一个正反馈：菌群失衡与肠屏障通透性增加使内毒素长期刺激宿主，经 TLR4 与 NF-κB 通路升高促炎因子，促炎因子又上调 Aβ 与抗菌肽的生成；聚集后的 Aβ 激活小胶质细胞产生更多炎症介质，循环自我加强。这也是抗菌保护假说的现代表述。</a:t>
+              <a:t>机制落点参照 AChE–Aβ 复合物的分子动力学研究：Aβ 对接进 PAS 后，复合物在 1 微秒模拟中保持稳定，主要停留区段是 344—361，该区段紧邻 PAS 但不受双位点抑制剂的位阻。同一界面的其他实验证据包括：丙锭可阻断 AChE 诱导的聚集而催化位点抑制剂无效、PAS 负电荷触发 β-发夹构象、丁酰胆碱酯酶反向延缓纤维形成。由此提出三个假设，并用对接与动力学给出优先序。</a:t>
             </a:r>
           </a:p>
         </p:txBody>
@@ -1435,7 +1435,7 @@
           <a:lstStyle/>
           <a:p>
             <a:r>
-              <a:t>机制落点参照 AChE–Aβ 复合物的分子动力学研究：Aβ 对接进 PAS 后，复合物在 1 微秒模拟中保持稳定，主要停留区段是 344—361，该区段紧邻 PAS 但不受双位点抑制剂的位阻。同一界面的其他实验证据包括：丙锭可阻断 AChE 诱导的聚集而催化位点抑制剂无效、PAS 负电荷触发 β-发夹构象、丁酰胆碱酯酶反向延缓纤维形成。由此提出三个假设，并用对接与动力学给出优先序。</a:t>
+              <a:t>这页说明分子机制为什么能解释得通：抗菌肽与 Aβ 结构兼容，可以交叉成核，方向取决于界面与浓度。支撑这一机制的模拟证据已经比较完整：AChE–Aβ 的 1 微秒模拟、AChE 疏水基序掺入纤维、LL-37 与淀粉样肽的离散动力学、抗菌肽类分子与 Aβ 的对接加动力学并用实验验证、以及五肽库筛选破坏 D23–K28 盐桥。这些结果说明用对接与动力学研究候选肽与 Aβ/AChE 的界面是可行的。</a:t>
             </a:r>
           </a:p>
         </p:txBody>
@@ -1505,7 +1505,7 @@
           <a:lstStyle/>
           <a:p>
             <a:r>
-              <a:t>这页说明分子机制为什么能解释得通：抗菌肽与 Aβ 结构兼容，可以交叉成核，方向取决于界面与浓度。支撑这一机制的模拟证据已经比较完整：AChE–Aβ 的 1 微秒模拟、AChE 疏水基序掺入纤维、LL-37 与淀粉样肽的离散动力学、抗菌肽类分子与 Aβ 的对接加动力学并用实验验证、以及五肽库筛选破坏 D23–K28 盐桥。这些结果说明用对接与动力学研究候选肽与 Aβ/AChE 的界面是可行的。</a:t>
+              <a:t>这张表把老师提出的八个问题逐条列出，并给出答案要点与证据强度。需要说明的是：关联类结论的证据强度较高，方向类结论（谁更多、促进还是抑制）存在例外与条件依赖，因此标注为中；微生物源抗菌肽在 AD 中的变化属于待验证部分，正是本课题要补的一环。</a:t>
             </a:r>
           </a:p>
         </p:txBody>
@@ -1575,7 +1575,7 @@
           <a:lstStyle/>
           <a:p>
             <a:r>
-              <a:t>这张表把老师提出的八个问题逐条列出，并给出答案要点与证据强度。需要说明的是：关联类结论的证据强度较高，方向类结论（谁更多、促进还是抑制）存在例外与条件依赖，因此标注为中；微生物源抗菌肽在 AD 中的变化属于待验证部分，正是本课题要补的一环。</a:t>
+              <a:t>机制说明文档《抗菌肽与AD关联机制说明》共整理 46 条文献，覆盖 AD 与感染、宿主抗菌肽在 AD 中的变化、抗菌肽预测方法、菌群分期、AChE–Aβ 与交叉成核的分子模拟，以及作为反例的乳铁蛋白下降证据。这里列出其中十条代表性文献及其结论。</a:t>
             </a:r>
           </a:p>
         </p:txBody>
@@ -1645,7 +1645,7 @@
           <a:lstStyle/>
           <a:p>
             <a:r>
-              <a:t>机制说明文档《抗菌肽与AD关联机制说明》共整理 46 条文献，覆盖 AD 与感染、宿主抗菌肽在 AD 中的变化、抗菌肽预测方法、菌群分期、AChE–Aβ 与交叉成核的分子模拟，以及作为反例的乳铁蛋白下降证据。这里列出其中十条代表性文献及其结论。</a:t>
+              <a:t>总结一下：主体分析工作已经在中期完成，剩余是机制关联的结论整理、抑菌实验验证和论文撰写，整体风险可控。我的汇报到此结束，请各位老师批评指正。</a:t>
             </a:r>
           </a:p>
         </p:txBody>
@@ -1855,7 +1855,7 @@
           <a:lstStyle/>
           <a:p>
             <a:r>
-              <a:t>这页说明整体流程：从测序数据到候选抗菌肽清单，共十二步，输入输出都可追溯。前九步已经在中期前完成，最后三步正在推进——机制关联分析、抑菌实验验证与结果整理。</a:t>
+              <a:t>这页说明整体流程：从测序数据到候选抗菌肽清单，共十二步，输入输出都可追溯。工具链是 fastp 与 KneadData 做质控去宿主，MEGAHIT 组装，MetaBAT2、MaxBin2 与 CONCOCT 多算法联合分箱后 metaWRAP 提纯，dRep 按 95% ANI 去冗余得到参考基因组集，EMBOSS getorf 预测 sORF 并做序列级去冗余，Attention / LSTM / BERT 三模型一致阳性才纳入候选，CoverM 定量并做 CLR 变换，用 Kruskal-Wallis 与 Mann-Whitney U 做组间检验，再用宏蛋白组表达证据二次去重。前九步已经在中期前完成，最后三步正在推进——机制关联分析、抑菌实验验证与结果整理。</a:t>
             </a:r>
           </a:p>
         </p:txBody>
@@ -1925,7 +1925,7 @@
           <a:lstStyle/>
           <a:p>
             <a:r>
-              <a:t>分组方式是这页的重点：五个认知阶段，每阶段内再按性别与三个年龄段分层，共三十个分层单元；每个单元内按年龄与性别匹配，得到结构一致的比较亚队列。各阶段的样本量相同、性别构成相同、组间平均年龄差小于两岁，这样阶段之间的差异不会来自年龄与性别构成。</a:t>
+              <a:t>分组方式是这页的重点：五个认知阶段，每阶段内再按性别与三个年龄段分层，共三十个分层单元；每个单元内按年龄与性别匹配，最终选出 265 例匹配亚队列——各阶段 53 例、每组 35 女 / 18 男，组间平均年龄最大差 1.8 岁，这样阶段之间的差异不会来自年龄与性别构成。</a:t>
             </a:r>
           </a:p>
         </p:txBody>
@@ -5795,8 +5795,8 @@
         </p:nvSpPr>
         <p:spPr>
           <a:xfrm>
-            <a:off x="640080" y="6053328"/>
-            <a:ext cx="10908792" cy="329184"/>
+            <a:off x="640080" y="6419088"/>
+            <a:ext cx="8778240" cy="310896"/>
           </a:xfrm>
           <a:prstGeom prst="rect">
             <a:avLst/>
@@ -5829,7 +5829,7 @@
                 <a:ea typeface="微软雅黑"/>
                 <a:cs typeface="Arial"/>
               </a:rPr>
-              <a:t>图：本项目自制（results/figures）</a:t>
+              <a:t>研究生论文中期检查 · 文绍华</a:t>
             </a:r>
           </a:p>
         </p:txBody>
@@ -5837,53 +5837,6 @@
       <p:sp>
         <p:nvSpPr>
           <p:cNvPr id="7" name="TextBox 6"/>
-          <p:cNvSpPr txBox="1"/>
-          <p:nvPr/>
-        </p:nvSpPr>
-        <p:spPr>
-          <a:xfrm>
-            <a:off x="640080" y="6419088"/>
-            <a:ext cx="8778240" cy="310896"/>
-          </a:xfrm>
-          <a:prstGeom prst="rect">
-            <a:avLst/>
-          </a:prstGeom>
-          <a:noFill/>
-        </p:spPr>
-        <p:txBody>
-          <a:bodyPr wrap="square" anchor="t" lIns="27432" rIns="27432" tIns="0" bIns="0">
-            <a:spAutoFit/>
-          </a:bodyPr>
-          <a:lstStyle/>
-          <a:p>
-            <a:pPr algn="l">
-              <a:lnSpc>
-                <a:spcPct val="100000"/>
-              </a:lnSpc>
-              <a:spcBef>
-                <a:spcPts val="0"/>
-              </a:spcBef>
-              <a:spcAft>
-                <a:spcPts val="0"/>
-              </a:spcAft>
-            </a:pPr>
-            <a:r>
-              <a:rPr sz="1500" b="0">
-                <a:solidFill>
-                  <a:srgbClr val="777777"/>
-                </a:solidFill>
-                <a:latin typeface="Arial"/>
-                <a:ea typeface="微软雅黑"/>
-                <a:cs typeface="Arial"/>
-              </a:rPr>
-              <a:t>研究生论文中期检查 · 文绍华</a:t>
-            </a:r>
-          </a:p>
-        </p:txBody>
-      </p:sp>
-      <p:sp>
-        <p:nvSpPr>
-          <p:cNvPr id="8" name="TextBox 7"/>
           <p:cNvSpPr txBox="1"/>
           <p:nvPr/>
         </p:nvSpPr>
@@ -6458,8 +6411,8 @@
         </p:nvSpPr>
         <p:spPr>
           <a:xfrm>
-            <a:off x="640080" y="6053328"/>
-            <a:ext cx="10908792" cy="329184"/>
+            <a:off x="640080" y="6419088"/>
+            <a:ext cx="8778240" cy="310896"/>
           </a:xfrm>
           <a:prstGeom prst="rect">
             <a:avLst/>
@@ -6492,7 +6445,7 @@
                 <a:ea typeface="微软雅黑"/>
                 <a:cs typeface="Arial"/>
               </a:rPr>
-              <a:t>图：本项目自制（results/figures）</a:t>
+              <a:t>研究生论文中期检查 · 文绍华</a:t>
             </a:r>
           </a:p>
         </p:txBody>
@@ -6500,53 +6453,6 @@
       <p:sp>
         <p:nvSpPr>
           <p:cNvPr id="8" name="TextBox 7"/>
-          <p:cNvSpPr txBox="1"/>
-          <p:nvPr/>
-        </p:nvSpPr>
-        <p:spPr>
-          <a:xfrm>
-            <a:off x="640080" y="6419088"/>
-            <a:ext cx="8778240" cy="310896"/>
-          </a:xfrm>
-          <a:prstGeom prst="rect">
-            <a:avLst/>
-          </a:prstGeom>
-          <a:noFill/>
-        </p:spPr>
-        <p:txBody>
-          <a:bodyPr wrap="square" anchor="t" lIns="27432" rIns="27432" tIns="0" bIns="0">
-            <a:spAutoFit/>
-          </a:bodyPr>
-          <a:lstStyle/>
-          <a:p>
-            <a:pPr algn="l">
-              <a:lnSpc>
-                <a:spcPct val="100000"/>
-              </a:lnSpc>
-              <a:spcBef>
-                <a:spcPts val="0"/>
-              </a:spcBef>
-              <a:spcAft>
-                <a:spcPts val="0"/>
-              </a:spcAft>
-            </a:pPr>
-            <a:r>
-              <a:rPr sz="1500" b="0">
-                <a:solidFill>
-                  <a:srgbClr val="777777"/>
-                </a:solidFill>
-                <a:latin typeface="Arial"/>
-                <a:ea typeface="微软雅黑"/>
-                <a:cs typeface="Arial"/>
-              </a:rPr>
-              <a:t>研究生论文中期检查 · 文绍华</a:t>
-            </a:r>
-          </a:p>
-        </p:txBody>
-      </p:sp>
-      <p:sp>
-        <p:nvSpPr>
-          <p:cNvPr id="9" name="TextBox 8"/>
           <p:cNvSpPr txBox="1"/>
           <p:nvPr/>
         </p:nvSpPr>
@@ -6779,8 +6685,8 @@
         </p:nvSpPr>
         <p:spPr>
           <a:xfrm>
-            <a:off x="640080" y="6053328"/>
-            <a:ext cx="10908792" cy="329184"/>
+            <a:off x="640080" y="6419088"/>
+            <a:ext cx="8778240" cy="310896"/>
           </a:xfrm>
           <a:prstGeom prst="rect">
             <a:avLst/>
@@ -6813,7 +6719,7 @@
                 <a:ea typeface="微软雅黑"/>
                 <a:cs typeface="Arial"/>
               </a:rPr>
-              <a:t>图：本项目自制（results/figures）</a:t>
+              <a:t>研究生论文中期检查 · 文绍华</a:t>
             </a:r>
           </a:p>
         </p:txBody>
@@ -6821,53 +6727,6 @@
       <p:sp>
         <p:nvSpPr>
           <p:cNvPr id="7" name="TextBox 6"/>
-          <p:cNvSpPr txBox="1"/>
-          <p:nvPr/>
-        </p:nvSpPr>
-        <p:spPr>
-          <a:xfrm>
-            <a:off x="640080" y="6419088"/>
-            <a:ext cx="8778240" cy="310896"/>
-          </a:xfrm>
-          <a:prstGeom prst="rect">
-            <a:avLst/>
-          </a:prstGeom>
-          <a:noFill/>
-        </p:spPr>
-        <p:txBody>
-          <a:bodyPr wrap="square" anchor="t" lIns="27432" rIns="27432" tIns="0" bIns="0">
-            <a:spAutoFit/>
-          </a:bodyPr>
-          <a:lstStyle/>
-          <a:p>
-            <a:pPr algn="l">
-              <a:lnSpc>
-                <a:spcPct val="100000"/>
-              </a:lnSpc>
-              <a:spcBef>
-                <a:spcPts val="0"/>
-              </a:spcBef>
-              <a:spcAft>
-                <a:spcPts val="0"/>
-              </a:spcAft>
-            </a:pPr>
-            <a:r>
-              <a:rPr sz="1500" b="0">
-                <a:solidFill>
-                  <a:srgbClr val="777777"/>
-                </a:solidFill>
-                <a:latin typeface="Arial"/>
-                <a:ea typeface="微软雅黑"/>
-                <a:cs typeface="Arial"/>
-              </a:rPr>
-              <a:t>研究生论文中期检查 · 文绍华</a:t>
-            </a:r>
-          </a:p>
-        </p:txBody>
-      </p:sp>
-      <p:sp>
-        <p:nvSpPr>
-          <p:cNvPr id="8" name="TextBox 7"/>
           <p:cNvSpPr txBox="1"/>
           <p:nvPr/>
         </p:nvSpPr>
@@ -9085,7 +8944,7 @@
                 <a:ea typeface="微软雅黑"/>
                 <a:cs typeface="Arial"/>
               </a:rPr>
-              <a:t>主要分析已完成，剩余工作风险可控</a:t>
+              <a:t>抗菌肽与 AD 的关联可以拆成七环，每环的证据强度不同</a:t>
             </a:r>
           </a:p>
         </p:txBody>
@@ -9134,16 +8993,40 @@
           </a:p>
         </p:txBody>
       </p:sp>
-      <p:sp>
-        <p:nvSpPr>
-          <p:cNvPr id="4" name="TextBox 3"/>
+      <p:pic>
+        <p:nvPicPr>
+          <p:cNvPr id="4" name="Picture 3" descr="figM1_关联逻辑链.png"/>
+          <p:cNvPicPr>
+            <a:picLocks noChangeAspect="1"/>
+          </p:cNvPicPr>
+          <p:nvPr/>
+        </p:nvPicPr>
+        <p:blipFill>
+          <a:blip r:embed="rId2"/>
+          <a:stretch>
+            <a:fillRect/>
+          </a:stretch>
+        </p:blipFill>
+        <p:spPr>
+          <a:xfrm>
+            <a:off x="1697813" y="1188720"/>
+            <a:ext cx="8793325" cy="3767328"/>
+          </a:xfrm>
+          <a:prstGeom prst="rect">
+            <a:avLst/>
+          </a:prstGeom>
+        </p:spPr>
+      </p:pic>
+      <p:sp>
+        <p:nvSpPr>
+          <p:cNvPr id="5" name="TextBox 4"/>
           <p:cNvSpPr txBox="1"/>
           <p:nvPr/>
         </p:nvSpPr>
         <p:spPr>
           <a:xfrm>
-            <a:off x="640080" y="1481328"/>
-            <a:ext cx="10424160" cy="3291840"/>
+            <a:off x="640080" y="5074920"/>
+            <a:ext cx="10908792" cy="868680"/>
           </a:xfrm>
           <a:prstGeom prst="rect">
             <a:avLst/>
@@ -9158,7 +9041,7 @@
           <a:p>
             <a:pPr algn="l">
               <a:lnSpc>
-                <a:spcPct val="134000"/>
+                <a:spcPct val="130000"/>
               </a:lnSpc>
               <a:spcBef>
                 <a:spcPts val="0"/>
@@ -9168,7 +9051,7 @@
               </a:spcAft>
             </a:pPr>
             <a:r>
-              <a:rPr sz="1800" b="0">
+              <a:rPr sz="1700" b="0">
                 <a:solidFill>
                   <a:srgbClr val="333333"/>
                 </a:solidFill>
@@ -9176,153 +9059,14 @@
                 <a:ea typeface="微软雅黑"/>
                 <a:cs typeface="Arial"/>
               </a:rPr>
-              <a:t>确认事实：数据资源、短肽库、三模型共识预测、分阶段差异分析与特有抗菌肽筛选均已完成。</a:t>
-            </a:r>
-          </a:p>
-          <a:p>
-            <a:pPr algn="l">
-              <a:lnSpc>
-                <a:spcPct val="134000"/>
-              </a:lnSpc>
-              <a:spcBef>
-                <a:spcPts val="1400"/>
-              </a:spcBef>
-              <a:spcAft>
-                <a:spcPts val="0"/>
-              </a:spcAft>
-            </a:pPr>
-            <a:r>
-              <a:rPr sz="1800" b="0">
-                <a:solidFill>
-                  <a:srgbClr val="333333"/>
-                </a:solidFill>
-                <a:latin typeface="Arial"/>
-                <a:ea typeface="微软雅黑"/>
-                <a:cs typeface="Arial"/>
-              </a:rPr>
-              <a:t>待完成：机制关联分析的结论整理、候选抗菌肽的抑菌实验验证，以及学位论文与投稿论文撰写。</a:t>
-            </a:r>
-          </a:p>
-          <a:p>
-            <a:pPr algn="l">
-              <a:lnSpc>
-                <a:spcPct val="134000"/>
-              </a:lnSpc>
-              <a:spcBef>
-                <a:spcPts val="1400"/>
-              </a:spcBef>
-              <a:spcAft>
-                <a:spcPts val="0"/>
-              </a:spcAft>
-            </a:pPr>
-            <a:r>
-              <a:rPr sz="1800" b="0">
-                <a:solidFill>
-                  <a:srgbClr val="333333"/>
-                </a:solidFill>
-                <a:latin typeface="Arial"/>
-                <a:ea typeface="微软雅黑"/>
-                <a:cs typeface="Arial"/>
-              </a:rPr>
-              <a:t>进度安排：按开题计划推进，后续不依赖新的数据生产。</a:t>
-            </a:r>
-          </a:p>
-        </p:txBody>
-      </p:sp>
-      <p:sp>
-        <p:nvSpPr>
-          <p:cNvPr id="5" name="Rectangle 4"/>
-          <p:cNvSpPr/>
-          <p:nvPr/>
-        </p:nvSpPr>
-        <p:spPr>
-          <a:xfrm>
-            <a:off x="640080" y="4846320"/>
-            <a:ext cx="1920240" cy="30480"/>
-          </a:xfrm>
-          <a:prstGeom prst="rect">
-            <a:avLst/>
-          </a:prstGeom>
-          <a:solidFill>
-            <a:srgbClr val="B03A2E"/>
-          </a:solidFill>
-          <a:ln>
-            <a:noFill/>
-          </a:ln>
-          <a:effectLst/>
-        </p:spPr>
-        <p:style>
-          <a:lnRef idx="1">
-            <a:schemeClr val="accent1"/>
-          </a:lnRef>
-          <a:fillRef idx="3">
-            <a:schemeClr val="accent1"/>
-          </a:fillRef>
-          <a:effectRef idx="2">
-            <a:schemeClr val="accent1"/>
-          </a:effectRef>
-          <a:fontRef idx="minor">
-            <a:schemeClr val="lt1"/>
-          </a:fontRef>
-        </p:style>
-        <p:txBody>
-          <a:bodyPr rtlCol="0" anchor="ctr"/>
-          <a:lstStyle/>
-          <a:p>
-            <a:pPr algn="ctr"/>
+              <a:t>① AD 与感染相关、② 感染与炎症驱动抗菌肽与 Aβ 生成、③ Aβ 本身即抗菌肽；④ 抗菌活性可计算预测、⑤ AD 组特异抗菌肽随阶段变化、⑥ 双刃剑效应；⑦ 为什么 AD 更多与分子机制落点，是本课题要回答的部分。</a:t>
+            </a:r>
           </a:p>
         </p:txBody>
       </p:sp>
       <p:sp>
         <p:nvSpPr>
           <p:cNvPr id="6" name="TextBox 5"/>
-          <p:cNvSpPr txBox="1"/>
-          <p:nvPr/>
-        </p:nvSpPr>
-        <p:spPr>
-          <a:xfrm>
-            <a:off x="640080" y="5084064"/>
-            <a:ext cx="10424160" cy="731520"/>
-          </a:xfrm>
-          <a:prstGeom prst="rect">
-            <a:avLst/>
-          </a:prstGeom>
-          <a:noFill/>
-        </p:spPr>
-        <p:txBody>
-          <a:bodyPr wrap="square" anchor="t" lIns="27432" rIns="27432" tIns="0" bIns="0">
-            <a:spAutoFit/>
-          </a:bodyPr>
-          <a:lstStyle/>
-          <a:p>
-            <a:pPr algn="l">
-              <a:lnSpc>
-                <a:spcPct val="110000"/>
-              </a:lnSpc>
-              <a:spcBef>
-                <a:spcPts val="0"/>
-              </a:spcBef>
-              <a:spcAft>
-                <a:spcPts val="0"/>
-              </a:spcAft>
-            </a:pPr>
-            <a:r>
-              <a:rPr sz="2000" b="1">
-                <a:solidFill>
-                  <a:srgbClr val="111111"/>
-                </a:solidFill>
-                <a:latin typeface="Arial"/>
-                <a:ea typeface="微软雅黑"/>
-                <a:cs typeface="Arial"/>
-              </a:rPr>
-              <a:t>谢谢各位老师，请批评指正。</a:t>
-            </a:r>
-          </a:p>
-        </p:txBody>
-      </p:sp>
-      <p:sp>
-        <p:nvSpPr>
-          <p:cNvPr id="7" name="TextBox 6"/>
           <p:cNvSpPr txBox="1"/>
           <p:nvPr/>
         </p:nvSpPr>
@@ -9369,7 +9113,7 @@
       </p:sp>
       <p:sp>
         <p:nvSpPr>
-          <p:cNvPr id="8" name="TextBox 7"/>
+          <p:cNvPr id="7" name="TextBox 6"/>
           <p:cNvSpPr txBox="1"/>
           <p:nvPr/>
         </p:nvSpPr>
@@ -9474,7 +9218,7 @@
                 <a:ea typeface="微软雅黑"/>
                 <a:cs typeface="Arial"/>
               </a:rPr>
-              <a:t>抗菌肽与 AD 的关联可以拆成七环，每环的证据强度不同</a:t>
+              <a:t>为什么 AD 组更多：炎症—Aβ—抗菌肽构成正反馈</a:t>
             </a:r>
           </a:p>
         </p:txBody>
@@ -9523,87 +9267,16 @@
           </a:p>
         </p:txBody>
       </p:sp>
-      <p:pic>
-        <p:nvPicPr>
-          <p:cNvPr id="4" name="Picture 3" descr="figM1_关联逻辑链.png"/>
-          <p:cNvPicPr>
-            <a:picLocks noChangeAspect="1"/>
-          </p:cNvPicPr>
-          <p:nvPr/>
-        </p:nvPicPr>
-        <p:blipFill>
-          <a:blip r:embed="rId2"/>
-          <a:stretch>
-            <a:fillRect/>
-          </a:stretch>
-        </p:blipFill>
-        <p:spPr>
-          <a:xfrm>
-            <a:off x="1697813" y="1188720"/>
-            <a:ext cx="8793325" cy="3767328"/>
-          </a:xfrm>
-          <a:prstGeom prst="rect">
-            <a:avLst/>
-          </a:prstGeom>
-        </p:spPr>
-      </p:pic>
-      <p:sp>
-        <p:nvSpPr>
-          <p:cNvPr id="5" name="TextBox 4"/>
+      <p:sp>
+        <p:nvSpPr>
+          <p:cNvPr id="4" name="TextBox 3"/>
           <p:cNvSpPr txBox="1"/>
           <p:nvPr/>
         </p:nvSpPr>
         <p:spPr>
           <a:xfrm>
-            <a:off x="640080" y="5074920"/>
-            <a:ext cx="10908792" cy="868680"/>
-          </a:xfrm>
-          <a:prstGeom prst="rect">
-            <a:avLst/>
-          </a:prstGeom>
-          <a:noFill/>
-        </p:spPr>
-        <p:txBody>
-          <a:bodyPr wrap="square" anchor="t" lIns="27432" rIns="27432" tIns="0" bIns="0">
-            <a:spAutoFit/>
-          </a:bodyPr>
-          <a:lstStyle/>
-          <a:p>
-            <a:pPr algn="l">
-              <a:lnSpc>
-                <a:spcPct val="130000"/>
-              </a:lnSpc>
-              <a:spcBef>
-                <a:spcPts val="0"/>
-              </a:spcBef>
-              <a:spcAft>
-                <a:spcPts val="0"/>
-              </a:spcAft>
-            </a:pPr>
-            <a:r>
-              <a:rPr sz="1700" b="0">
-                <a:solidFill>
-                  <a:srgbClr val="333333"/>
-                </a:solidFill>
-                <a:latin typeface="Arial"/>
-                <a:ea typeface="微软雅黑"/>
-                <a:cs typeface="Arial"/>
-              </a:rPr>
-              <a:t>① AD 与感染相关、② 感染与炎症驱动抗菌肽与 Aβ 生成、③ Aβ 本身即抗菌肽；④ 抗菌活性可计算预测、⑤ AD 组特异抗菌肽随阶段变化、⑥ 双刃剑效应；⑦ 为什么 AD 更多与分子机制落点，是本课题要回答的部分。</a:t>
-            </a:r>
-          </a:p>
-        </p:txBody>
-      </p:sp>
-      <p:sp>
-        <p:nvSpPr>
-          <p:cNvPr id="6" name="TextBox 5"/>
-          <p:cNvSpPr txBox="1"/>
-          <p:nvPr/>
-        </p:nvSpPr>
-        <p:spPr>
-          <a:xfrm>
-            <a:off x="640080" y="6053328"/>
-            <a:ext cx="10908792" cy="329184"/>
+            <a:off x="640080" y="1444752"/>
+            <a:ext cx="548640" cy="457200"/>
           </a:xfrm>
           <a:prstGeom prst="rect">
             <a:avLst/>
@@ -9628,16 +9301,131 @@
               </a:spcAft>
             </a:pPr>
             <a:r>
-              <a:rPr sz="1500" b="0">
-                <a:solidFill>
-                  <a:srgbClr val="777777"/>
-                </a:solidFill>
-                <a:latin typeface="Arial"/>
-                <a:ea typeface="微软雅黑"/>
-                <a:cs typeface="Arial"/>
-              </a:rPr>
-              <a:t>图：本项目自制（results/figures）</a:t>
-            </a:r>
+              <a:rPr sz="2000" b="1">
+                <a:solidFill>
+                  <a:srgbClr val="B03A2E"/>
+                </a:solidFill>
+                <a:latin typeface="Arial"/>
+                <a:ea typeface="微软雅黑"/>
+                <a:cs typeface="Arial"/>
+              </a:rPr>
+              <a:t>01</a:t>
+            </a:r>
+          </a:p>
+        </p:txBody>
+      </p:sp>
+      <p:sp>
+        <p:nvSpPr>
+          <p:cNvPr id="5" name="TextBox 4"/>
+          <p:cNvSpPr txBox="1"/>
+          <p:nvPr/>
+        </p:nvSpPr>
+        <p:spPr>
+          <a:xfrm>
+            <a:off x="1207008" y="1444752"/>
+            <a:ext cx="10332720" cy="969264"/>
+          </a:xfrm>
+          <a:prstGeom prst="rect">
+            <a:avLst/>
+          </a:prstGeom>
+          <a:noFill/>
+        </p:spPr>
+        <p:txBody>
+          <a:bodyPr wrap="square" anchor="t" lIns="27432" rIns="27432" tIns="0" bIns="0">
+            <a:spAutoFit/>
+          </a:bodyPr>
+          <a:lstStyle/>
+          <a:p>
+            <a:pPr algn="l">
+              <a:lnSpc>
+                <a:spcPct val="108000"/>
+              </a:lnSpc>
+              <a:spcBef>
+                <a:spcPts val="0"/>
+              </a:spcBef>
+              <a:spcAft>
+                <a:spcPts val="0"/>
+              </a:spcAft>
+            </a:pPr>
+            <a:r>
+              <a:rPr sz="1800" b="1">
+                <a:solidFill>
+                  <a:srgbClr val="111111"/>
+                </a:solidFill>
+                <a:latin typeface="Arial"/>
+                <a:ea typeface="微软雅黑"/>
+                <a:cs typeface="Arial"/>
+              </a:rPr>
+              <a:t>上游驱动：菌群失衡与肠屏障通透性升高</a:t>
+            </a:r>
+          </a:p>
+          <a:p>
+            <a:pPr algn="l">
+              <a:lnSpc>
+                <a:spcPct val="120000"/>
+              </a:lnSpc>
+              <a:spcBef>
+                <a:spcPts val="300"/>
+              </a:spcBef>
+              <a:spcAft>
+                <a:spcPts val="0"/>
+              </a:spcAft>
+            </a:pPr>
+            <a:r>
+              <a:rPr sz="1600" b="0">
+                <a:solidFill>
+                  <a:srgbClr val="333333"/>
+                </a:solidFill>
+                <a:latin typeface="Arial"/>
+                <a:ea typeface="微软雅黑"/>
+                <a:cs typeface="Arial"/>
+              </a:rPr>
+              <a:t>AD 与前驱阶段的肠道菌群失衡、肠屏障标志物升高，使内毒素与病原体长期入血 [11][17][46]。</a:t>
+            </a:r>
+          </a:p>
+        </p:txBody>
+      </p:sp>
+      <p:sp>
+        <p:nvSpPr>
+          <p:cNvPr id="6" name="Rectangle 5"/>
+          <p:cNvSpPr/>
+          <p:nvPr/>
+        </p:nvSpPr>
+        <p:spPr>
+          <a:xfrm>
+            <a:off x="640080" y="2249424"/>
+            <a:ext cx="10908792" cy="12700"/>
+          </a:xfrm>
+          <a:prstGeom prst="rect">
+            <a:avLst/>
+          </a:prstGeom>
+          <a:solidFill>
+            <a:srgbClr val="DDDDDA"/>
+          </a:solidFill>
+          <a:ln>
+            <a:noFill/>
+          </a:ln>
+          <a:effectLst/>
+        </p:spPr>
+        <p:style>
+          <a:lnRef idx="1">
+            <a:schemeClr val="accent1"/>
+          </a:lnRef>
+          <a:fillRef idx="3">
+            <a:schemeClr val="accent1"/>
+          </a:fillRef>
+          <a:effectRef idx="2">
+            <a:schemeClr val="accent1"/>
+          </a:effectRef>
+          <a:fontRef idx="minor">
+            <a:schemeClr val="lt1"/>
+          </a:fontRef>
+        </p:style>
+        <p:txBody>
+          <a:bodyPr rtlCol="0" anchor="ctr"/>
+          <a:lstStyle/>
+          <a:p>
+            <a:pPr algn="ctr"/>
           </a:p>
         </p:txBody>
       </p:sp>
@@ -9649,8 +9437,8 @@
         </p:nvSpPr>
         <p:spPr>
           <a:xfrm>
-            <a:off x="640080" y="6419088"/>
-            <a:ext cx="8778240" cy="310896"/>
+            <a:off x="640080" y="2523744"/>
+            <a:ext cx="548640" cy="457200"/>
           </a:xfrm>
           <a:prstGeom prst="rect">
             <a:avLst/>
@@ -9675,6 +9463,448 @@
               </a:spcAft>
             </a:pPr>
             <a:r>
+              <a:rPr sz="2000" b="1">
+                <a:solidFill>
+                  <a:srgbClr val="B03A2E"/>
+                </a:solidFill>
+                <a:latin typeface="Arial"/>
+                <a:ea typeface="微软雅黑"/>
+                <a:cs typeface="Arial"/>
+              </a:rPr>
+              <a:t>02</a:t>
+            </a:r>
+          </a:p>
+        </p:txBody>
+      </p:sp>
+      <p:sp>
+        <p:nvSpPr>
+          <p:cNvPr id="8" name="TextBox 7"/>
+          <p:cNvSpPr txBox="1"/>
+          <p:nvPr/>
+        </p:nvSpPr>
+        <p:spPr>
+          <a:xfrm>
+            <a:off x="1207008" y="2523744"/>
+            <a:ext cx="10332720" cy="969264"/>
+          </a:xfrm>
+          <a:prstGeom prst="rect">
+            <a:avLst/>
+          </a:prstGeom>
+          <a:noFill/>
+        </p:spPr>
+        <p:txBody>
+          <a:bodyPr wrap="square" anchor="t" lIns="27432" rIns="27432" tIns="0" bIns="0">
+            <a:spAutoFit/>
+          </a:bodyPr>
+          <a:lstStyle/>
+          <a:p>
+            <a:pPr algn="l">
+              <a:lnSpc>
+                <a:spcPct val="108000"/>
+              </a:lnSpc>
+              <a:spcBef>
+                <a:spcPts val="0"/>
+              </a:spcBef>
+              <a:spcAft>
+                <a:spcPts val="0"/>
+              </a:spcAft>
+            </a:pPr>
+            <a:r>
+              <a:rPr sz="1800" b="1">
+                <a:solidFill>
+                  <a:srgbClr val="111111"/>
+                </a:solidFill>
+                <a:latin typeface="Arial"/>
+                <a:ea typeface="微软雅黑"/>
+                <a:cs typeface="Arial"/>
+              </a:rPr>
+              <a:t>放大环节：促炎因子上调 Aβ 与抗菌肽的表达</a:t>
+            </a:r>
+          </a:p>
+          <a:p>
+            <a:pPr algn="l">
+              <a:lnSpc>
+                <a:spcPct val="120000"/>
+              </a:lnSpc>
+              <a:spcBef>
+                <a:spcPts val="300"/>
+              </a:spcBef>
+              <a:spcAft>
+                <a:spcPts val="0"/>
+              </a:spcAft>
+            </a:pPr>
+            <a:r>
+              <a:rPr sz="1600" b="0">
+                <a:solidFill>
+                  <a:srgbClr val="333333"/>
+                </a:solidFill>
+                <a:latin typeface="Arial"/>
+                <a:ea typeface="微软雅黑"/>
+                <a:cs typeface="Arial"/>
+              </a:rPr>
+              <a:t>LPS 经 TLR4/NF-κB 升高促炎因子，促炎因子又上调 Aβ 生成 [11][46]；TNF-α 与 Aβ 可直接诱导 CAP37 表达 [9]。</a:t>
+            </a:r>
+          </a:p>
+        </p:txBody>
+      </p:sp>
+      <p:sp>
+        <p:nvSpPr>
+          <p:cNvPr id="9" name="Rectangle 8"/>
+          <p:cNvSpPr/>
+          <p:nvPr/>
+        </p:nvSpPr>
+        <p:spPr>
+          <a:xfrm>
+            <a:off x="640080" y="3328415"/>
+            <a:ext cx="10908792" cy="12700"/>
+          </a:xfrm>
+          <a:prstGeom prst="rect">
+            <a:avLst/>
+          </a:prstGeom>
+          <a:solidFill>
+            <a:srgbClr val="DDDDDA"/>
+          </a:solidFill>
+          <a:ln>
+            <a:noFill/>
+          </a:ln>
+          <a:effectLst/>
+        </p:spPr>
+        <p:style>
+          <a:lnRef idx="1">
+            <a:schemeClr val="accent1"/>
+          </a:lnRef>
+          <a:fillRef idx="3">
+            <a:schemeClr val="accent1"/>
+          </a:fillRef>
+          <a:effectRef idx="2">
+            <a:schemeClr val="accent1"/>
+          </a:effectRef>
+          <a:fontRef idx="minor">
+            <a:schemeClr val="lt1"/>
+          </a:fontRef>
+        </p:style>
+        <p:txBody>
+          <a:bodyPr rtlCol="0" anchor="ctr"/>
+          <a:lstStyle/>
+          <a:p>
+            <a:pPr algn="ctr"/>
+          </a:p>
+        </p:txBody>
+      </p:sp>
+      <p:sp>
+        <p:nvSpPr>
+          <p:cNvPr id="10" name="TextBox 9"/>
+          <p:cNvSpPr txBox="1"/>
+          <p:nvPr/>
+        </p:nvSpPr>
+        <p:spPr>
+          <a:xfrm>
+            <a:off x="640080" y="3602735"/>
+            <a:ext cx="548640" cy="457200"/>
+          </a:xfrm>
+          <a:prstGeom prst="rect">
+            <a:avLst/>
+          </a:prstGeom>
+          <a:noFill/>
+        </p:spPr>
+        <p:txBody>
+          <a:bodyPr wrap="square" anchor="t" lIns="27432" rIns="27432" tIns="0" bIns="0">
+            <a:spAutoFit/>
+          </a:bodyPr>
+          <a:lstStyle/>
+          <a:p>
+            <a:pPr algn="l">
+              <a:lnSpc>
+                <a:spcPct val="100000"/>
+              </a:lnSpc>
+              <a:spcBef>
+                <a:spcPts val="0"/>
+              </a:spcBef>
+              <a:spcAft>
+                <a:spcPts val="0"/>
+              </a:spcAft>
+            </a:pPr>
+            <a:r>
+              <a:rPr sz="2000" b="1">
+                <a:solidFill>
+                  <a:srgbClr val="B03A2E"/>
+                </a:solidFill>
+                <a:latin typeface="Arial"/>
+                <a:ea typeface="微软雅黑"/>
+                <a:cs typeface="Arial"/>
+              </a:rPr>
+              <a:t>03</a:t>
+            </a:r>
+          </a:p>
+        </p:txBody>
+      </p:sp>
+      <p:sp>
+        <p:nvSpPr>
+          <p:cNvPr id="11" name="TextBox 10"/>
+          <p:cNvSpPr txBox="1"/>
+          <p:nvPr/>
+        </p:nvSpPr>
+        <p:spPr>
+          <a:xfrm>
+            <a:off x="1207008" y="3602735"/>
+            <a:ext cx="10332720" cy="969264"/>
+          </a:xfrm>
+          <a:prstGeom prst="rect">
+            <a:avLst/>
+          </a:prstGeom>
+          <a:noFill/>
+        </p:spPr>
+        <p:txBody>
+          <a:bodyPr wrap="square" anchor="t" lIns="27432" rIns="27432" tIns="0" bIns="0">
+            <a:spAutoFit/>
+          </a:bodyPr>
+          <a:lstStyle/>
+          <a:p>
+            <a:pPr algn="l">
+              <a:lnSpc>
+                <a:spcPct val="108000"/>
+              </a:lnSpc>
+              <a:spcBef>
+                <a:spcPts val="0"/>
+              </a:spcBef>
+              <a:spcAft>
+                <a:spcPts val="0"/>
+              </a:spcAft>
+            </a:pPr>
+            <a:r>
+              <a:rPr sz="1800" b="1">
+                <a:solidFill>
+                  <a:srgbClr val="111111"/>
+                </a:solidFill>
+                <a:latin typeface="Arial"/>
+                <a:ea typeface="微软雅黑"/>
+                <a:cs typeface="Arial"/>
+              </a:rPr>
+              <a:t>闭环：聚集后的 Aβ 再激活小胶质细胞</a:t>
+            </a:r>
+          </a:p>
+          <a:p>
+            <a:pPr algn="l">
+              <a:lnSpc>
+                <a:spcPct val="120000"/>
+              </a:lnSpc>
+              <a:spcBef>
+                <a:spcPts val="300"/>
+              </a:spcBef>
+              <a:spcAft>
+                <a:spcPts val="0"/>
+              </a:spcAft>
+            </a:pPr>
+            <a:r>
+              <a:rPr sz="1600" b="0">
+                <a:solidFill>
+                  <a:srgbClr val="333333"/>
+                </a:solidFill>
+                <a:latin typeface="Arial"/>
+                <a:ea typeface="微软雅黑"/>
+                <a:cs typeface="Arial"/>
+              </a:rPr>
+              <a:t>Aβ 与抗菌肽聚集、成核并激活小胶质细胞，释放更多炎症介质；LL-37 经 CLIC1 引起小胶质过度活化，小鼠与猴模型出现 Aβ 升高与脑萎缩 [6][7]。</a:t>
+            </a:r>
+          </a:p>
+        </p:txBody>
+      </p:sp>
+      <p:sp>
+        <p:nvSpPr>
+          <p:cNvPr id="12" name="Rectangle 11"/>
+          <p:cNvSpPr/>
+          <p:nvPr/>
+        </p:nvSpPr>
+        <p:spPr>
+          <a:xfrm>
+            <a:off x="640080" y="4407407"/>
+            <a:ext cx="10908792" cy="12700"/>
+          </a:xfrm>
+          <a:prstGeom prst="rect">
+            <a:avLst/>
+          </a:prstGeom>
+          <a:solidFill>
+            <a:srgbClr val="DDDDDA"/>
+          </a:solidFill>
+          <a:ln>
+            <a:noFill/>
+          </a:ln>
+          <a:effectLst/>
+        </p:spPr>
+        <p:style>
+          <a:lnRef idx="1">
+            <a:schemeClr val="accent1"/>
+          </a:lnRef>
+          <a:fillRef idx="3">
+            <a:schemeClr val="accent1"/>
+          </a:fillRef>
+          <a:effectRef idx="2">
+            <a:schemeClr val="accent1"/>
+          </a:effectRef>
+          <a:fontRef idx="minor">
+            <a:schemeClr val="lt1"/>
+          </a:fontRef>
+        </p:style>
+        <p:txBody>
+          <a:bodyPr rtlCol="0" anchor="ctr"/>
+          <a:lstStyle/>
+          <a:p>
+            <a:pPr algn="ctr"/>
+          </a:p>
+        </p:txBody>
+      </p:sp>
+      <p:sp>
+        <p:nvSpPr>
+          <p:cNvPr id="13" name="TextBox 12"/>
+          <p:cNvSpPr txBox="1"/>
+          <p:nvPr/>
+        </p:nvSpPr>
+        <p:spPr>
+          <a:xfrm>
+            <a:off x="640080" y="4681727"/>
+            <a:ext cx="548640" cy="457200"/>
+          </a:xfrm>
+          <a:prstGeom prst="rect">
+            <a:avLst/>
+          </a:prstGeom>
+          <a:noFill/>
+        </p:spPr>
+        <p:txBody>
+          <a:bodyPr wrap="square" anchor="t" lIns="27432" rIns="27432" tIns="0" bIns="0">
+            <a:spAutoFit/>
+          </a:bodyPr>
+          <a:lstStyle/>
+          <a:p>
+            <a:pPr algn="l">
+              <a:lnSpc>
+                <a:spcPct val="100000"/>
+              </a:lnSpc>
+              <a:spcBef>
+                <a:spcPts val="0"/>
+              </a:spcBef>
+              <a:spcAft>
+                <a:spcPts val="0"/>
+              </a:spcAft>
+            </a:pPr>
+            <a:r>
+              <a:rPr sz="2000" b="1">
+                <a:solidFill>
+                  <a:srgbClr val="B03A2E"/>
+                </a:solidFill>
+                <a:latin typeface="Arial"/>
+                <a:ea typeface="微软雅黑"/>
+                <a:cs typeface="Arial"/>
+              </a:rPr>
+              <a:t>04</a:t>
+            </a:r>
+          </a:p>
+        </p:txBody>
+      </p:sp>
+      <p:sp>
+        <p:nvSpPr>
+          <p:cNvPr id="14" name="TextBox 13"/>
+          <p:cNvSpPr txBox="1"/>
+          <p:nvPr/>
+        </p:nvSpPr>
+        <p:spPr>
+          <a:xfrm>
+            <a:off x="1207008" y="4681727"/>
+            <a:ext cx="10332720" cy="969264"/>
+          </a:xfrm>
+          <a:prstGeom prst="rect">
+            <a:avLst/>
+          </a:prstGeom>
+          <a:noFill/>
+        </p:spPr>
+        <p:txBody>
+          <a:bodyPr wrap="square" anchor="t" lIns="27432" rIns="27432" tIns="0" bIns="0">
+            <a:spAutoFit/>
+          </a:bodyPr>
+          <a:lstStyle/>
+          <a:p>
+            <a:pPr algn="l">
+              <a:lnSpc>
+                <a:spcPct val="108000"/>
+              </a:lnSpc>
+              <a:spcBef>
+                <a:spcPts val="0"/>
+              </a:spcBef>
+              <a:spcAft>
+                <a:spcPts val="0"/>
+              </a:spcAft>
+            </a:pPr>
+            <a:r>
+              <a:rPr sz="1800" b="1">
+                <a:solidFill>
+                  <a:srgbClr val="111111"/>
+                </a:solidFill>
+                <a:latin typeface="Arial"/>
+                <a:ea typeface="微软雅黑"/>
+                <a:cs typeface="Arial"/>
+              </a:rPr>
+              <a:t>临床对应：炎症指标与抗菌肽水平同步升高</a:t>
+            </a:r>
+          </a:p>
+          <a:p>
+            <a:pPr algn="l">
+              <a:lnSpc>
+                <a:spcPct val="120000"/>
+              </a:lnSpc>
+              <a:spcBef>
+                <a:spcPts val="300"/>
+              </a:spcBef>
+              <a:spcAft>
+                <a:spcPts val="0"/>
+              </a:spcAft>
+            </a:pPr>
+            <a:r>
+              <a:rPr sz="1600" b="0">
+                <a:solidFill>
+                  <a:srgbClr val="333333"/>
+                </a:solidFill>
+                <a:latin typeface="Arial"/>
+                <a:ea typeface="微软雅黑"/>
+                <a:cs typeface="Arial"/>
+              </a:rPr>
+              <a:t>血清 LL-37 高者两年内 MMSE 下降 ≥3 分的比值比为 2.11，NfL 与 pTau181 上升更快 [42]；前驱阶段的 CRP 与 LPS 已经升高 [17]。</a:t>
+            </a:r>
+          </a:p>
+        </p:txBody>
+      </p:sp>
+      <p:sp>
+        <p:nvSpPr>
+          <p:cNvPr id="15" name="TextBox 14"/>
+          <p:cNvSpPr txBox="1"/>
+          <p:nvPr/>
+        </p:nvSpPr>
+        <p:spPr>
+          <a:xfrm>
+            <a:off x="640080" y="6419088"/>
+            <a:ext cx="8778240" cy="310896"/>
+          </a:xfrm>
+          <a:prstGeom prst="rect">
+            <a:avLst/>
+          </a:prstGeom>
+          <a:noFill/>
+        </p:spPr>
+        <p:txBody>
+          <a:bodyPr wrap="square" anchor="t" lIns="27432" rIns="27432" tIns="0" bIns="0">
+            <a:spAutoFit/>
+          </a:bodyPr>
+          <a:lstStyle/>
+          <a:p>
+            <a:pPr algn="l">
+              <a:lnSpc>
+                <a:spcPct val="100000"/>
+              </a:lnSpc>
+              <a:spcBef>
+                <a:spcPts val="0"/>
+              </a:spcBef>
+              <a:spcAft>
+                <a:spcPts val="0"/>
+              </a:spcAft>
+            </a:pPr>
+            <a:r>
               <a:rPr sz="1500" b="0">
                 <a:solidFill>
                   <a:srgbClr val="777777"/>
@@ -9690,7 +9920,7 @@
       </p:sp>
       <p:sp>
         <p:nvSpPr>
-          <p:cNvPr id="8" name="TextBox 7"/>
+          <p:cNvPr id="16" name="TextBox 15"/>
           <p:cNvSpPr txBox="1"/>
           <p:nvPr/>
         </p:nvSpPr>
@@ -10232,7 +10462,7 @@
                 <a:ea typeface="微软雅黑"/>
                 <a:cs typeface="Arial"/>
               </a:rPr>
-              <a:t>为什么 AD 组更多：炎症—Aβ—抗菌肽构成正反馈</a:t>
+              <a:t>分子机制（一）：AChE–Aβ 复合物的动力学要点</a:t>
             </a:r>
           </a:p>
         </p:txBody>
@@ -10281,16 +10511,87 @@
           </a:p>
         </p:txBody>
       </p:sp>
-      <p:sp>
-        <p:nvSpPr>
-          <p:cNvPr id="4" name="TextBox 3"/>
+      <p:pic>
+        <p:nvPicPr>
+          <p:cNvPr id="4" name="Picture 3" descr="figM2_AChE_Aβ_机制.png"/>
+          <p:cNvPicPr>
+            <a:picLocks noChangeAspect="1"/>
+          </p:cNvPicPr>
+          <p:nvPr/>
+        </p:nvPicPr>
+        <p:blipFill>
+          <a:blip r:embed="rId2"/>
+          <a:stretch>
+            <a:fillRect/>
+          </a:stretch>
+        </p:blipFill>
+        <p:spPr>
+          <a:xfrm>
+            <a:off x="825790" y="1188720"/>
+            <a:ext cx="10537371" cy="3931920"/>
+          </a:xfrm>
+          <a:prstGeom prst="rect">
+            <a:avLst/>
+          </a:prstGeom>
+        </p:spPr>
+      </p:pic>
+      <p:sp>
+        <p:nvSpPr>
+          <p:cNvPr id="5" name="TextBox 4"/>
           <p:cNvSpPr txBox="1"/>
           <p:nvPr/>
         </p:nvSpPr>
         <p:spPr>
           <a:xfrm>
-            <a:off x="640080" y="1444752"/>
-            <a:ext cx="548640" cy="457200"/>
+            <a:off x="640080" y="5248655"/>
+            <a:ext cx="10908792" cy="749808"/>
+          </a:xfrm>
+          <a:prstGeom prst="rect">
+            <a:avLst/>
+          </a:prstGeom>
+          <a:noFill/>
+        </p:spPr>
+        <p:txBody>
+          <a:bodyPr wrap="square" anchor="t" lIns="27432" rIns="27432" tIns="0" bIns="0">
+            <a:spAutoFit/>
+          </a:bodyPr>
+          <a:lstStyle/>
+          <a:p>
+            <a:pPr algn="l">
+              <a:lnSpc>
+                <a:spcPct val="124000"/>
+              </a:lnSpc>
+              <a:spcBef>
+                <a:spcPts val="0"/>
+              </a:spcBef>
+              <a:spcAft>
+                <a:spcPts val="0"/>
+              </a:spcAft>
+            </a:pPr>
+            <a:r>
+              <a:rPr sz="1600" b="0">
+                <a:solidFill>
+                  <a:srgbClr val="333333"/>
+                </a:solidFill>
+                <a:latin typeface="Arial"/>
+                <a:ea typeface="微软雅黑"/>
+                <a:cs typeface="Arial"/>
+              </a:rPr>
+              <a:t>PAS 是 Aβ 聚集的成核中心：1 μs 模拟中复合物稳定，Aβ 主要停留于 344—361 区段，不受双位点抑制剂位阻 [31]；丙锭阻断 PAS 后聚集被抑制 [33]。</a:t>
+            </a:r>
+          </a:p>
+        </p:txBody>
+      </p:sp>
+      <p:sp>
+        <p:nvSpPr>
+          <p:cNvPr id="6" name="TextBox 5"/>
+          <p:cNvSpPr txBox="1"/>
+          <p:nvPr/>
+        </p:nvSpPr>
+        <p:spPr>
+          <a:xfrm>
+            <a:off x="640080" y="6419088"/>
+            <a:ext cx="8778240" cy="310896"/>
           </a:xfrm>
           <a:prstGeom prst="rect">
             <a:avLst/>
@@ -10315,626 +10616,22 @@
               </a:spcAft>
             </a:pPr>
             <a:r>
-              <a:rPr sz="2000" b="1">
-                <a:solidFill>
-                  <a:srgbClr val="B03A2E"/>
-                </a:solidFill>
-                <a:latin typeface="Arial"/>
-                <a:ea typeface="微软雅黑"/>
-                <a:cs typeface="Arial"/>
-              </a:rPr>
-              <a:t>01</a:t>
-            </a:r>
-          </a:p>
-        </p:txBody>
-      </p:sp>
-      <p:sp>
-        <p:nvSpPr>
-          <p:cNvPr id="5" name="TextBox 4"/>
-          <p:cNvSpPr txBox="1"/>
-          <p:nvPr/>
-        </p:nvSpPr>
-        <p:spPr>
-          <a:xfrm>
-            <a:off x="1207008" y="1444752"/>
-            <a:ext cx="10332720" cy="969264"/>
-          </a:xfrm>
-          <a:prstGeom prst="rect">
-            <a:avLst/>
-          </a:prstGeom>
-          <a:noFill/>
-        </p:spPr>
-        <p:txBody>
-          <a:bodyPr wrap="square" anchor="t" lIns="27432" rIns="27432" tIns="0" bIns="0">
-            <a:spAutoFit/>
-          </a:bodyPr>
-          <a:lstStyle/>
-          <a:p>
-            <a:pPr algn="l">
-              <a:lnSpc>
-                <a:spcPct val="108000"/>
-              </a:lnSpc>
-              <a:spcBef>
-                <a:spcPts val="0"/>
-              </a:spcBef>
-              <a:spcAft>
-                <a:spcPts val="0"/>
-              </a:spcAft>
-            </a:pPr>
-            <a:r>
-              <a:rPr sz="1800" b="1">
-                <a:solidFill>
-                  <a:srgbClr val="111111"/>
-                </a:solidFill>
-                <a:latin typeface="Arial"/>
-                <a:ea typeface="微软雅黑"/>
-                <a:cs typeface="Arial"/>
-              </a:rPr>
-              <a:t>上游驱动：菌群失衡与肠屏障通透性升高</a:t>
-            </a:r>
-          </a:p>
-          <a:p>
-            <a:pPr algn="l">
-              <a:lnSpc>
-                <a:spcPct val="120000"/>
-              </a:lnSpc>
-              <a:spcBef>
-                <a:spcPts val="300"/>
-              </a:spcBef>
-              <a:spcAft>
-                <a:spcPts val="0"/>
-              </a:spcAft>
-            </a:pPr>
-            <a:r>
-              <a:rPr sz="1600" b="0">
-                <a:solidFill>
-                  <a:srgbClr val="333333"/>
-                </a:solidFill>
-                <a:latin typeface="Arial"/>
-                <a:ea typeface="微软雅黑"/>
-                <a:cs typeface="Arial"/>
-              </a:rPr>
-              <a:t>AD 与前驱阶段的肠道菌群失衡、肠屏障标志物升高，使内毒素与病原体长期入血 [11][17][46]。</a:t>
-            </a:r>
-          </a:p>
-        </p:txBody>
-      </p:sp>
-      <p:sp>
-        <p:nvSpPr>
-          <p:cNvPr id="6" name="Rectangle 5"/>
-          <p:cNvSpPr/>
-          <p:nvPr/>
-        </p:nvSpPr>
-        <p:spPr>
-          <a:xfrm>
-            <a:off x="640080" y="2249424"/>
-            <a:ext cx="10908792" cy="12700"/>
-          </a:xfrm>
-          <a:prstGeom prst="rect">
-            <a:avLst/>
-          </a:prstGeom>
-          <a:solidFill>
-            <a:srgbClr val="DDDDDA"/>
-          </a:solidFill>
-          <a:ln>
-            <a:noFill/>
-          </a:ln>
-          <a:effectLst/>
-        </p:spPr>
-        <p:style>
-          <a:lnRef idx="1">
-            <a:schemeClr val="accent1"/>
-          </a:lnRef>
-          <a:fillRef idx="3">
-            <a:schemeClr val="accent1"/>
-          </a:fillRef>
-          <a:effectRef idx="2">
-            <a:schemeClr val="accent1"/>
-          </a:effectRef>
-          <a:fontRef idx="minor">
-            <a:schemeClr val="lt1"/>
-          </a:fontRef>
-        </p:style>
-        <p:txBody>
-          <a:bodyPr rtlCol="0" anchor="ctr"/>
-          <a:lstStyle/>
-          <a:p>
-            <a:pPr algn="ctr"/>
+              <a:rPr sz="1500" b="0">
+                <a:solidFill>
+                  <a:srgbClr val="777777"/>
+                </a:solidFill>
+                <a:latin typeface="Arial"/>
+                <a:ea typeface="微软雅黑"/>
+                <a:cs typeface="Arial"/>
+              </a:rPr>
+              <a:t>研究生论文中期检查 · 文绍华</a:t>
+            </a:r>
           </a:p>
         </p:txBody>
       </p:sp>
       <p:sp>
         <p:nvSpPr>
           <p:cNvPr id="7" name="TextBox 6"/>
-          <p:cNvSpPr txBox="1"/>
-          <p:nvPr/>
-        </p:nvSpPr>
-        <p:spPr>
-          <a:xfrm>
-            <a:off x="640080" y="2523744"/>
-            <a:ext cx="548640" cy="457200"/>
-          </a:xfrm>
-          <a:prstGeom prst="rect">
-            <a:avLst/>
-          </a:prstGeom>
-          <a:noFill/>
-        </p:spPr>
-        <p:txBody>
-          <a:bodyPr wrap="square" anchor="t" lIns="27432" rIns="27432" tIns="0" bIns="0">
-            <a:spAutoFit/>
-          </a:bodyPr>
-          <a:lstStyle/>
-          <a:p>
-            <a:pPr algn="l">
-              <a:lnSpc>
-                <a:spcPct val="100000"/>
-              </a:lnSpc>
-              <a:spcBef>
-                <a:spcPts val="0"/>
-              </a:spcBef>
-              <a:spcAft>
-                <a:spcPts val="0"/>
-              </a:spcAft>
-            </a:pPr>
-            <a:r>
-              <a:rPr sz="2000" b="1">
-                <a:solidFill>
-                  <a:srgbClr val="B03A2E"/>
-                </a:solidFill>
-                <a:latin typeface="Arial"/>
-                <a:ea typeface="微软雅黑"/>
-                <a:cs typeface="Arial"/>
-              </a:rPr>
-              <a:t>02</a:t>
-            </a:r>
-          </a:p>
-        </p:txBody>
-      </p:sp>
-      <p:sp>
-        <p:nvSpPr>
-          <p:cNvPr id="8" name="TextBox 7"/>
-          <p:cNvSpPr txBox="1"/>
-          <p:nvPr/>
-        </p:nvSpPr>
-        <p:spPr>
-          <a:xfrm>
-            <a:off x="1207008" y="2523744"/>
-            <a:ext cx="10332720" cy="969264"/>
-          </a:xfrm>
-          <a:prstGeom prst="rect">
-            <a:avLst/>
-          </a:prstGeom>
-          <a:noFill/>
-        </p:spPr>
-        <p:txBody>
-          <a:bodyPr wrap="square" anchor="t" lIns="27432" rIns="27432" tIns="0" bIns="0">
-            <a:spAutoFit/>
-          </a:bodyPr>
-          <a:lstStyle/>
-          <a:p>
-            <a:pPr algn="l">
-              <a:lnSpc>
-                <a:spcPct val="108000"/>
-              </a:lnSpc>
-              <a:spcBef>
-                <a:spcPts val="0"/>
-              </a:spcBef>
-              <a:spcAft>
-                <a:spcPts val="0"/>
-              </a:spcAft>
-            </a:pPr>
-            <a:r>
-              <a:rPr sz="1800" b="1">
-                <a:solidFill>
-                  <a:srgbClr val="111111"/>
-                </a:solidFill>
-                <a:latin typeface="Arial"/>
-                <a:ea typeface="微软雅黑"/>
-                <a:cs typeface="Arial"/>
-              </a:rPr>
-              <a:t>放大环节：促炎因子上调 Aβ 与抗菌肽的表达</a:t>
-            </a:r>
-          </a:p>
-          <a:p>
-            <a:pPr algn="l">
-              <a:lnSpc>
-                <a:spcPct val="120000"/>
-              </a:lnSpc>
-              <a:spcBef>
-                <a:spcPts val="300"/>
-              </a:spcBef>
-              <a:spcAft>
-                <a:spcPts val="0"/>
-              </a:spcAft>
-            </a:pPr>
-            <a:r>
-              <a:rPr sz="1600" b="0">
-                <a:solidFill>
-                  <a:srgbClr val="333333"/>
-                </a:solidFill>
-                <a:latin typeface="Arial"/>
-                <a:ea typeface="微软雅黑"/>
-                <a:cs typeface="Arial"/>
-              </a:rPr>
-              <a:t>LPS 经 TLR4/NF-κB 升高促炎因子，促炎因子又上调 Aβ 生成 [11][46]；TNF-α 与 Aβ 可直接诱导 CAP37 表达 [9]。</a:t>
-            </a:r>
-          </a:p>
-        </p:txBody>
-      </p:sp>
-      <p:sp>
-        <p:nvSpPr>
-          <p:cNvPr id="9" name="Rectangle 8"/>
-          <p:cNvSpPr/>
-          <p:nvPr/>
-        </p:nvSpPr>
-        <p:spPr>
-          <a:xfrm>
-            <a:off x="640080" y="3328415"/>
-            <a:ext cx="10908792" cy="12700"/>
-          </a:xfrm>
-          <a:prstGeom prst="rect">
-            <a:avLst/>
-          </a:prstGeom>
-          <a:solidFill>
-            <a:srgbClr val="DDDDDA"/>
-          </a:solidFill>
-          <a:ln>
-            <a:noFill/>
-          </a:ln>
-          <a:effectLst/>
-        </p:spPr>
-        <p:style>
-          <a:lnRef idx="1">
-            <a:schemeClr val="accent1"/>
-          </a:lnRef>
-          <a:fillRef idx="3">
-            <a:schemeClr val="accent1"/>
-          </a:fillRef>
-          <a:effectRef idx="2">
-            <a:schemeClr val="accent1"/>
-          </a:effectRef>
-          <a:fontRef idx="minor">
-            <a:schemeClr val="lt1"/>
-          </a:fontRef>
-        </p:style>
-        <p:txBody>
-          <a:bodyPr rtlCol="0" anchor="ctr"/>
-          <a:lstStyle/>
-          <a:p>
-            <a:pPr algn="ctr"/>
-          </a:p>
-        </p:txBody>
-      </p:sp>
-      <p:sp>
-        <p:nvSpPr>
-          <p:cNvPr id="10" name="TextBox 9"/>
-          <p:cNvSpPr txBox="1"/>
-          <p:nvPr/>
-        </p:nvSpPr>
-        <p:spPr>
-          <a:xfrm>
-            <a:off x="640080" y="3602735"/>
-            <a:ext cx="548640" cy="457200"/>
-          </a:xfrm>
-          <a:prstGeom prst="rect">
-            <a:avLst/>
-          </a:prstGeom>
-          <a:noFill/>
-        </p:spPr>
-        <p:txBody>
-          <a:bodyPr wrap="square" anchor="t" lIns="27432" rIns="27432" tIns="0" bIns="0">
-            <a:spAutoFit/>
-          </a:bodyPr>
-          <a:lstStyle/>
-          <a:p>
-            <a:pPr algn="l">
-              <a:lnSpc>
-                <a:spcPct val="100000"/>
-              </a:lnSpc>
-              <a:spcBef>
-                <a:spcPts val="0"/>
-              </a:spcBef>
-              <a:spcAft>
-                <a:spcPts val="0"/>
-              </a:spcAft>
-            </a:pPr>
-            <a:r>
-              <a:rPr sz="2000" b="1">
-                <a:solidFill>
-                  <a:srgbClr val="B03A2E"/>
-                </a:solidFill>
-                <a:latin typeface="Arial"/>
-                <a:ea typeface="微软雅黑"/>
-                <a:cs typeface="Arial"/>
-              </a:rPr>
-              <a:t>03</a:t>
-            </a:r>
-          </a:p>
-        </p:txBody>
-      </p:sp>
-      <p:sp>
-        <p:nvSpPr>
-          <p:cNvPr id="11" name="TextBox 10"/>
-          <p:cNvSpPr txBox="1"/>
-          <p:nvPr/>
-        </p:nvSpPr>
-        <p:spPr>
-          <a:xfrm>
-            <a:off x="1207008" y="3602735"/>
-            <a:ext cx="10332720" cy="969264"/>
-          </a:xfrm>
-          <a:prstGeom prst="rect">
-            <a:avLst/>
-          </a:prstGeom>
-          <a:noFill/>
-        </p:spPr>
-        <p:txBody>
-          <a:bodyPr wrap="square" anchor="t" lIns="27432" rIns="27432" tIns="0" bIns="0">
-            <a:spAutoFit/>
-          </a:bodyPr>
-          <a:lstStyle/>
-          <a:p>
-            <a:pPr algn="l">
-              <a:lnSpc>
-                <a:spcPct val="108000"/>
-              </a:lnSpc>
-              <a:spcBef>
-                <a:spcPts val="0"/>
-              </a:spcBef>
-              <a:spcAft>
-                <a:spcPts val="0"/>
-              </a:spcAft>
-            </a:pPr>
-            <a:r>
-              <a:rPr sz="1800" b="1">
-                <a:solidFill>
-                  <a:srgbClr val="111111"/>
-                </a:solidFill>
-                <a:latin typeface="Arial"/>
-                <a:ea typeface="微软雅黑"/>
-                <a:cs typeface="Arial"/>
-              </a:rPr>
-              <a:t>闭环：聚集后的 Aβ 再激活小胶质细胞</a:t>
-            </a:r>
-          </a:p>
-          <a:p>
-            <a:pPr algn="l">
-              <a:lnSpc>
-                <a:spcPct val="120000"/>
-              </a:lnSpc>
-              <a:spcBef>
-                <a:spcPts val="300"/>
-              </a:spcBef>
-              <a:spcAft>
-                <a:spcPts val="0"/>
-              </a:spcAft>
-            </a:pPr>
-            <a:r>
-              <a:rPr sz="1600" b="0">
-                <a:solidFill>
-                  <a:srgbClr val="333333"/>
-                </a:solidFill>
-                <a:latin typeface="Arial"/>
-                <a:ea typeface="微软雅黑"/>
-                <a:cs typeface="Arial"/>
-              </a:rPr>
-              <a:t>Aβ 与抗菌肽聚集、成核并激活小胶质细胞，释放更多炎症介质；LL-37 经 CLIC1 引起小胶质过度活化，小鼠与猴模型出现 Aβ 升高与脑萎缩 [6][7]。</a:t>
-            </a:r>
-          </a:p>
-        </p:txBody>
-      </p:sp>
-      <p:sp>
-        <p:nvSpPr>
-          <p:cNvPr id="12" name="Rectangle 11"/>
-          <p:cNvSpPr/>
-          <p:nvPr/>
-        </p:nvSpPr>
-        <p:spPr>
-          <a:xfrm>
-            <a:off x="640080" y="4407407"/>
-            <a:ext cx="10908792" cy="12700"/>
-          </a:xfrm>
-          <a:prstGeom prst="rect">
-            <a:avLst/>
-          </a:prstGeom>
-          <a:solidFill>
-            <a:srgbClr val="DDDDDA"/>
-          </a:solidFill>
-          <a:ln>
-            <a:noFill/>
-          </a:ln>
-          <a:effectLst/>
-        </p:spPr>
-        <p:style>
-          <a:lnRef idx="1">
-            <a:schemeClr val="accent1"/>
-          </a:lnRef>
-          <a:fillRef idx="3">
-            <a:schemeClr val="accent1"/>
-          </a:fillRef>
-          <a:effectRef idx="2">
-            <a:schemeClr val="accent1"/>
-          </a:effectRef>
-          <a:fontRef idx="minor">
-            <a:schemeClr val="lt1"/>
-          </a:fontRef>
-        </p:style>
-        <p:txBody>
-          <a:bodyPr rtlCol="0" anchor="ctr"/>
-          <a:lstStyle/>
-          <a:p>
-            <a:pPr algn="ctr"/>
-          </a:p>
-        </p:txBody>
-      </p:sp>
-      <p:sp>
-        <p:nvSpPr>
-          <p:cNvPr id="13" name="TextBox 12"/>
-          <p:cNvSpPr txBox="1"/>
-          <p:nvPr/>
-        </p:nvSpPr>
-        <p:spPr>
-          <a:xfrm>
-            <a:off x="640080" y="4681727"/>
-            <a:ext cx="548640" cy="457200"/>
-          </a:xfrm>
-          <a:prstGeom prst="rect">
-            <a:avLst/>
-          </a:prstGeom>
-          <a:noFill/>
-        </p:spPr>
-        <p:txBody>
-          <a:bodyPr wrap="square" anchor="t" lIns="27432" rIns="27432" tIns="0" bIns="0">
-            <a:spAutoFit/>
-          </a:bodyPr>
-          <a:lstStyle/>
-          <a:p>
-            <a:pPr algn="l">
-              <a:lnSpc>
-                <a:spcPct val="100000"/>
-              </a:lnSpc>
-              <a:spcBef>
-                <a:spcPts val="0"/>
-              </a:spcBef>
-              <a:spcAft>
-                <a:spcPts val="0"/>
-              </a:spcAft>
-            </a:pPr>
-            <a:r>
-              <a:rPr sz="2000" b="1">
-                <a:solidFill>
-                  <a:srgbClr val="B03A2E"/>
-                </a:solidFill>
-                <a:latin typeface="Arial"/>
-                <a:ea typeface="微软雅黑"/>
-                <a:cs typeface="Arial"/>
-              </a:rPr>
-              <a:t>04</a:t>
-            </a:r>
-          </a:p>
-        </p:txBody>
-      </p:sp>
-      <p:sp>
-        <p:nvSpPr>
-          <p:cNvPr id="14" name="TextBox 13"/>
-          <p:cNvSpPr txBox="1"/>
-          <p:nvPr/>
-        </p:nvSpPr>
-        <p:spPr>
-          <a:xfrm>
-            <a:off x="1207008" y="4681727"/>
-            <a:ext cx="10332720" cy="969264"/>
-          </a:xfrm>
-          <a:prstGeom prst="rect">
-            <a:avLst/>
-          </a:prstGeom>
-          <a:noFill/>
-        </p:spPr>
-        <p:txBody>
-          <a:bodyPr wrap="square" anchor="t" lIns="27432" rIns="27432" tIns="0" bIns="0">
-            <a:spAutoFit/>
-          </a:bodyPr>
-          <a:lstStyle/>
-          <a:p>
-            <a:pPr algn="l">
-              <a:lnSpc>
-                <a:spcPct val="108000"/>
-              </a:lnSpc>
-              <a:spcBef>
-                <a:spcPts val="0"/>
-              </a:spcBef>
-              <a:spcAft>
-                <a:spcPts val="0"/>
-              </a:spcAft>
-            </a:pPr>
-            <a:r>
-              <a:rPr sz="1800" b="1">
-                <a:solidFill>
-                  <a:srgbClr val="111111"/>
-                </a:solidFill>
-                <a:latin typeface="Arial"/>
-                <a:ea typeface="微软雅黑"/>
-                <a:cs typeface="Arial"/>
-              </a:rPr>
-              <a:t>临床对应：炎症指标与抗菌肽水平同步升高</a:t>
-            </a:r>
-          </a:p>
-          <a:p>
-            <a:pPr algn="l">
-              <a:lnSpc>
-                <a:spcPct val="120000"/>
-              </a:lnSpc>
-              <a:spcBef>
-                <a:spcPts val="300"/>
-              </a:spcBef>
-              <a:spcAft>
-                <a:spcPts val="0"/>
-              </a:spcAft>
-            </a:pPr>
-            <a:r>
-              <a:rPr sz="1600" b="0">
-                <a:solidFill>
-                  <a:srgbClr val="333333"/>
-                </a:solidFill>
-                <a:latin typeface="Arial"/>
-                <a:ea typeface="微软雅黑"/>
-                <a:cs typeface="Arial"/>
-              </a:rPr>
-              <a:t>血清 LL-37 高者两年内 MMSE 下降 ≥3 分的比值比为 2.11，NfL 与 pTau181 上升更快 [42]；前驱阶段的 CRP 与 LPS 已经升高 [17]。</a:t>
-            </a:r>
-          </a:p>
-        </p:txBody>
-      </p:sp>
-      <p:sp>
-        <p:nvSpPr>
-          <p:cNvPr id="15" name="TextBox 14"/>
-          <p:cNvSpPr txBox="1"/>
-          <p:nvPr/>
-        </p:nvSpPr>
-        <p:spPr>
-          <a:xfrm>
-            <a:off x="640080" y="6419088"/>
-            <a:ext cx="8778240" cy="310896"/>
-          </a:xfrm>
-          <a:prstGeom prst="rect">
-            <a:avLst/>
-          </a:prstGeom>
-          <a:noFill/>
-        </p:spPr>
-        <p:txBody>
-          <a:bodyPr wrap="square" anchor="t" lIns="27432" rIns="27432" tIns="0" bIns="0">
-            <a:spAutoFit/>
-          </a:bodyPr>
-          <a:lstStyle/>
-          <a:p>
-            <a:pPr algn="l">
-              <a:lnSpc>
-                <a:spcPct val="100000"/>
-              </a:lnSpc>
-              <a:spcBef>
-                <a:spcPts val="0"/>
-              </a:spcBef>
-              <a:spcAft>
-                <a:spcPts val="0"/>
-              </a:spcAft>
-            </a:pPr>
-            <a:r>
-              <a:rPr sz="1500" b="0">
-                <a:solidFill>
-                  <a:srgbClr val="777777"/>
-                </a:solidFill>
-                <a:latin typeface="Arial"/>
-                <a:ea typeface="微软雅黑"/>
-                <a:cs typeface="Arial"/>
-              </a:rPr>
-              <a:t>研究生论文中期检查 · 文绍华</a:t>
-            </a:r>
-          </a:p>
-        </p:txBody>
-      </p:sp>
-      <p:sp>
-        <p:nvSpPr>
-          <p:cNvPr id="16" name="TextBox 15"/>
           <p:cNvSpPr txBox="1"/>
           <p:nvPr/>
         </p:nvSpPr>
@@ -11039,7 +10736,7 @@
                 <a:ea typeface="微软雅黑"/>
                 <a:cs typeface="Arial"/>
               </a:rPr>
-              <a:t>分子机制（一）：AChE–Aβ 复合物的动力学要点</a:t>
+              <a:t>分子机制（二）：抗菌肽与 Aβ 的交叉成核，方向由界面决定</a:t>
             </a:r>
           </a:p>
         </p:txBody>
@@ -11090,7 +10787,7 @@
       </p:sp>
       <p:pic>
         <p:nvPicPr>
-          <p:cNvPr id="4" name="Picture 3" descr="figM2_AChE_Aβ_机制.png"/>
+          <p:cNvPr id="4" name="Picture 3" descr="figM3_交叉成核机制.png"/>
           <p:cNvPicPr>
             <a:picLocks noChangeAspect="1"/>
           </p:cNvPicPr>
@@ -11154,7 +10851,7 @@
                 <a:ea typeface="微软雅黑"/>
                 <a:cs typeface="Arial"/>
               </a:rPr>
-              <a:t>PAS 是 Aβ 聚集的成核中心：1 μs 模拟中复合物稳定，Aβ 主要停留于 344—361 区段，不受双位点抑制剂位阻 [31]；丙锭阻断 PAS 后聚集被抑制 [33]。</a:t>
+              <a:t>抗菌肽与 Aβ 结构兼容，可交叉成核，方向由界面与浓度决定 [36][37]；LL-37 以疏水作用封堵纤维延伸面 [38]，五肽库筛选可破坏 D23—K28 盐桥 [41]。</a:t>
             </a:r>
           </a:p>
         </p:txBody>
@@ -11167,8 +10864,8 @@
         </p:nvSpPr>
         <p:spPr>
           <a:xfrm>
-            <a:off x="640080" y="6053328"/>
-            <a:ext cx="10908792" cy="329184"/>
+            <a:off x="640080" y="6419088"/>
+            <a:ext cx="8778240" cy="310896"/>
           </a:xfrm>
           <a:prstGeom prst="rect">
             <a:avLst/>
@@ -11201,7 +10898,7 @@
                 <a:ea typeface="微软雅黑"/>
                 <a:cs typeface="Arial"/>
               </a:rPr>
-              <a:t>图：本项目自制（results/figures/figM2）</a:t>
+              <a:t>研究生论文中期检查 · 文绍华</a:t>
             </a:r>
           </a:p>
         </p:txBody>
@@ -11209,53 +10906,6 @@
       <p:sp>
         <p:nvSpPr>
           <p:cNvPr id="7" name="TextBox 6"/>
-          <p:cNvSpPr txBox="1"/>
-          <p:nvPr/>
-        </p:nvSpPr>
-        <p:spPr>
-          <a:xfrm>
-            <a:off x="640080" y="6419088"/>
-            <a:ext cx="8778240" cy="310896"/>
-          </a:xfrm>
-          <a:prstGeom prst="rect">
-            <a:avLst/>
-          </a:prstGeom>
-          <a:noFill/>
-        </p:spPr>
-        <p:txBody>
-          <a:bodyPr wrap="square" anchor="t" lIns="27432" rIns="27432" tIns="0" bIns="0">
-            <a:spAutoFit/>
-          </a:bodyPr>
-          <a:lstStyle/>
-          <a:p>
-            <a:pPr algn="l">
-              <a:lnSpc>
-                <a:spcPct val="100000"/>
-              </a:lnSpc>
-              <a:spcBef>
-                <a:spcPts val="0"/>
-              </a:spcBef>
-              <a:spcAft>
-                <a:spcPts val="0"/>
-              </a:spcAft>
-            </a:pPr>
-            <a:r>
-              <a:rPr sz="1500" b="0">
-                <a:solidFill>
-                  <a:srgbClr val="777777"/>
-                </a:solidFill>
-                <a:latin typeface="Arial"/>
-                <a:ea typeface="微软雅黑"/>
-                <a:cs typeface="Arial"/>
-              </a:rPr>
-              <a:t>研究生论文中期检查 · 文绍华</a:t>
-            </a:r>
-          </a:p>
-        </p:txBody>
-      </p:sp>
-      <p:sp>
-        <p:nvSpPr>
-          <p:cNvPr id="8" name="TextBox 7"/>
           <p:cNvSpPr txBox="1"/>
           <p:nvPr/>
         </p:nvSpPr>
@@ -11309,327 +10959,6 @@
 </file>
 
 <file path=ppt/slides/slide22.xml><?xml version="1.0" encoding="utf-8"?>
-<p:sld xmlns:a="http://schemas.openxmlformats.org/drawingml/2006/main" xmlns:p="http://schemas.openxmlformats.org/presentationml/2006/main" xmlns:r="http://schemas.openxmlformats.org/officeDocument/2006/relationships">
-  <p:cSld>
-    <p:spTree>
-      <p:nvGrpSpPr>
-        <p:cNvPr id="1" name=""/>
-        <p:cNvGrpSpPr/>
-        <p:nvPr/>
-      </p:nvGrpSpPr>
-      <p:grpSpPr/>
-      <p:sp>
-        <p:nvSpPr>
-          <p:cNvPr id="2" name="TextBox 1"/>
-          <p:cNvSpPr txBox="1"/>
-          <p:nvPr/>
-        </p:nvSpPr>
-        <p:spPr>
-          <a:xfrm>
-            <a:off x="640080" y="365760"/>
-            <a:ext cx="10908792" cy="548640"/>
-          </a:xfrm>
-          <a:prstGeom prst="rect">
-            <a:avLst/>
-          </a:prstGeom>
-          <a:noFill/>
-        </p:spPr>
-        <p:txBody>
-          <a:bodyPr wrap="square" anchor="t" lIns="27432" rIns="27432" tIns="0" bIns="0">
-            <a:spAutoFit/>
-          </a:bodyPr>
-          <a:lstStyle/>
-          <a:p>
-            <a:pPr algn="l">
-              <a:lnSpc>
-                <a:spcPct val="100000"/>
-              </a:lnSpc>
-              <a:spcBef>
-                <a:spcPts val="0"/>
-              </a:spcBef>
-              <a:spcAft>
-                <a:spcPts val="0"/>
-              </a:spcAft>
-            </a:pPr>
-            <a:r>
-              <a:rPr sz="2500" b="1">
-                <a:solidFill>
-                  <a:srgbClr val="111111"/>
-                </a:solidFill>
-                <a:latin typeface="Arial"/>
-                <a:ea typeface="微软雅黑"/>
-                <a:cs typeface="Arial"/>
-              </a:rPr>
-              <a:t>分子机制（二）：抗菌肽与 Aβ 的交叉成核，方向由界面决定</a:t>
-            </a:r>
-          </a:p>
-        </p:txBody>
-      </p:sp>
-      <p:sp>
-        <p:nvSpPr>
-          <p:cNvPr id="3" name="Rectangle 2"/>
-          <p:cNvSpPr/>
-          <p:nvPr/>
-        </p:nvSpPr>
-        <p:spPr>
-          <a:xfrm>
-            <a:off x="640080" y="969264"/>
-            <a:ext cx="10908792" cy="12700"/>
-          </a:xfrm>
-          <a:prstGeom prst="rect">
-            <a:avLst/>
-          </a:prstGeom>
-          <a:solidFill>
-            <a:srgbClr val="DDDDDA"/>
-          </a:solidFill>
-          <a:ln>
-            <a:noFill/>
-          </a:ln>
-          <a:effectLst/>
-        </p:spPr>
-        <p:style>
-          <a:lnRef idx="1">
-            <a:schemeClr val="accent1"/>
-          </a:lnRef>
-          <a:fillRef idx="3">
-            <a:schemeClr val="accent1"/>
-          </a:fillRef>
-          <a:effectRef idx="2">
-            <a:schemeClr val="accent1"/>
-          </a:effectRef>
-          <a:fontRef idx="minor">
-            <a:schemeClr val="lt1"/>
-          </a:fontRef>
-        </p:style>
-        <p:txBody>
-          <a:bodyPr rtlCol="0" anchor="ctr"/>
-          <a:lstStyle/>
-          <a:p>
-            <a:pPr algn="ctr"/>
-          </a:p>
-        </p:txBody>
-      </p:sp>
-      <p:pic>
-        <p:nvPicPr>
-          <p:cNvPr id="4" name="Picture 3" descr="figM3_交叉成核机制.png"/>
-          <p:cNvPicPr>
-            <a:picLocks noChangeAspect="1"/>
-          </p:cNvPicPr>
-          <p:nvPr/>
-        </p:nvPicPr>
-        <p:blipFill>
-          <a:blip r:embed="rId2"/>
-          <a:stretch>
-            <a:fillRect/>
-          </a:stretch>
-        </p:blipFill>
-        <p:spPr>
-          <a:xfrm>
-            <a:off x="825790" y="1188720"/>
-            <a:ext cx="10537371" cy="3931920"/>
-          </a:xfrm>
-          <a:prstGeom prst="rect">
-            <a:avLst/>
-          </a:prstGeom>
-        </p:spPr>
-      </p:pic>
-      <p:sp>
-        <p:nvSpPr>
-          <p:cNvPr id="5" name="TextBox 4"/>
-          <p:cNvSpPr txBox="1"/>
-          <p:nvPr/>
-        </p:nvSpPr>
-        <p:spPr>
-          <a:xfrm>
-            <a:off x="640080" y="5248655"/>
-            <a:ext cx="10908792" cy="749808"/>
-          </a:xfrm>
-          <a:prstGeom prst="rect">
-            <a:avLst/>
-          </a:prstGeom>
-          <a:noFill/>
-        </p:spPr>
-        <p:txBody>
-          <a:bodyPr wrap="square" anchor="t" lIns="27432" rIns="27432" tIns="0" bIns="0">
-            <a:spAutoFit/>
-          </a:bodyPr>
-          <a:lstStyle/>
-          <a:p>
-            <a:pPr algn="l">
-              <a:lnSpc>
-                <a:spcPct val="124000"/>
-              </a:lnSpc>
-              <a:spcBef>
-                <a:spcPts val="0"/>
-              </a:spcBef>
-              <a:spcAft>
-                <a:spcPts val="0"/>
-              </a:spcAft>
-            </a:pPr>
-            <a:r>
-              <a:rPr sz="1600" b="0">
-                <a:solidFill>
-                  <a:srgbClr val="333333"/>
-                </a:solidFill>
-                <a:latin typeface="Arial"/>
-                <a:ea typeface="微软雅黑"/>
-                <a:cs typeface="Arial"/>
-              </a:rPr>
-              <a:t>抗菌肽与 Aβ 结构兼容，可交叉成核，方向由界面与浓度决定 [36][37]；LL-37 以疏水作用封堵纤维延伸面 [38]，五肽库筛选可破坏 D23—K28 盐桥 [41]。</a:t>
-            </a:r>
-          </a:p>
-        </p:txBody>
-      </p:sp>
-      <p:sp>
-        <p:nvSpPr>
-          <p:cNvPr id="6" name="TextBox 5"/>
-          <p:cNvSpPr txBox="1"/>
-          <p:nvPr/>
-        </p:nvSpPr>
-        <p:spPr>
-          <a:xfrm>
-            <a:off x="640080" y="6053328"/>
-            <a:ext cx="10908792" cy="329184"/>
-          </a:xfrm>
-          <a:prstGeom prst="rect">
-            <a:avLst/>
-          </a:prstGeom>
-          <a:noFill/>
-        </p:spPr>
-        <p:txBody>
-          <a:bodyPr wrap="square" anchor="t" lIns="27432" rIns="27432" tIns="0" bIns="0">
-            <a:spAutoFit/>
-          </a:bodyPr>
-          <a:lstStyle/>
-          <a:p>
-            <a:pPr algn="l">
-              <a:lnSpc>
-                <a:spcPct val="100000"/>
-              </a:lnSpc>
-              <a:spcBef>
-                <a:spcPts val="0"/>
-              </a:spcBef>
-              <a:spcAft>
-                <a:spcPts val="0"/>
-              </a:spcAft>
-            </a:pPr>
-            <a:r>
-              <a:rPr sz="1500" b="0">
-                <a:solidFill>
-                  <a:srgbClr val="777777"/>
-                </a:solidFill>
-                <a:latin typeface="Arial"/>
-                <a:ea typeface="微软雅黑"/>
-                <a:cs typeface="Arial"/>
-              </a:rPr>
-              <a:t>图：本项目自制（results/figures/figM3）</a:t>
-            </a:r>
-          </a:p>
-        </p:txBody>
-      </p:sp>
-      <p:sp>
-        <p:nvSpPr>
-          <p:cNvPr id="7" name="TextBox 6"/>
-          <p:cNvSpPr txBox="1"/>
-          <p:nvPr/>
-        </p:nvSpPr>
-        <p:spPr>
-          <a:xfrm>
-            <a:off x="640080" y="6419088"/>
-            <a:ext cx="8778240" cy="310896"/>
-          </a:xfrm>
-          <a:prstGeom prst="rect">
-            <a:avLst/>
-          </a:prstGeom>
-          <a:noFill/>
-        </p:spPr>
-        <p:txBody>
-          <a:bodyPr wrap="square" anchor="t" lIns="27432" rIns="27432" tIns="0" bIns="0">
-            <a:spAutoFit/>
-          </a:bodyPr>
-          <a:lstStyle/>
-          <a:p>
-            <a:pPr algn="l">
-              <a:lnSpc>
-                <a:spcPct val="100000"/>
-              </a:lnSpc>
-              <a:spcBef>
-                <a:spcPts val="0"/>
-              </a:spcBef>
-              <a:spcAft>
-                <a:spcPts val="0"/>
-              </a:spcAft>
-            </a:pPr>
-            <a:r>
-              <a:rPr sz="1500" b="0">
-                <a:solidFill>
-                  <a:srgbClr val="777777"/>
-                </a:solidFill>
-                <a:latin typeface="Arial"/>
-                <a:ea typeface="微软雅黑"/>
-                <a:cs typeface="Arial"/>
-              </a:rPr>
-              <a:t>研究生论文中期检查 · 文绍华</a:t>
-            </a:r>
-          </a:p>
-        </p:txBody>
-      </p:sp>
-      <p:sp>
-        <p:nvSpPr>
-          <p:cNvPr id="8" name="TextBox 7"/>
-          <p:cNvSpPr txBox="1"/>
-          <p:nvPr/>
-        </p:nvSpPr>
-        <p:spPr>
-          <a:xfrm>
-            <a:off x="10058400" y="6419088"/>
-            <a:ext cx="1490472" cy="310896"/>
-          </a:xfrm>
-          <a:prstGeom prst="rect">
-            <a:avLst/>
-          </a:prstGeom>
-          <a:noFill/>
-        </p:spPr>
-        <p:txBody>
-          <a:bodyPr wrap="square" anchor="t" lIns="27432" rIns="27432" tIns="0" bIns="0">
-            <a:spAutoFit/>
-          </a:bodyPr>
-          <a:lstStyle/>
-          <a:p>
-            <a:pPr algn="r">
-              <a:lnSpc>
-                <a:spcPct val="100000"/>
-              </a:lnSpc>
-              <a:spcBef>
-                <a:spcPts val="0"/>
-              </a:spcBef>
-              <a:spcAft>
-                <a:spcPts val="0"/>
-              </a:spcAft>
-            </a:pPr>
-            <a:r>
-              <a:rPr sz="1500" b="0">
-                <a:solidFill>
-                  <a:srgbClr val="777777"/>
-                </a:solidFill>
-                <a:latin typeface="Arial"/>
-                <a:ea typeface="微软雅黑"/>
-                <a:cs typeface="Arial"/>
-              </a:rPr>
-              <a:t>22 / 24</a:t>
-            </a:r>
-          </a:p>
-        </p:txBody>
-      </p:sp>
-    </p:spTree>
-  </p:cSld>
-  <p:clrMapOvr>
-    <a:masterClrMapping/>
-  </p:clrMapOvr>
-</p:sld>
-</file>
-
-<file path=ppt/slides/slide23.xml><?xml version="1.0" encoding="utf-8"?>
 <p:sld xmlns:a="http://schemas.openxmlformats.org/drawingml/2006/main" xmlns:p="http://schemas.openxmlformats.org/presentationml/2006/main" xmlns:r="http://schemas.openxmlformats.org/officeDocument/2006/relationships">
   <p:cSld>
     <p:spTree>
@@ -13125,7 +12454,7 @@
                 <a:ea typeface="微软雅黑"/>
                 <a:cs typeface="Arial"/>
               </a:rPr>
-              <a:t>23 / 24</a:t>
+              <a:t>22 / 24</a:t>
             </a:r>
           </a:p>
         </p:txBody>
@@ -13138,7 +12467,7 @@
 </p:sld>
 </file>
 
-<file path=ppt/slides/slide24.xml><?xml version="1.0" encoding="utf-8"?>
+<file path=ppt/slides/slide23.xml><?xml version="1.0" encoding="utf-8"?>
 <p:sld xmlns:a="http://schemas.openxmlformats.org/drawingml/2006/main" xmlns:p="http://schemas.openxmlformats.org/presentationml/2006/main" xmlns:r="http://schemas.openxmlformats.org/officeDocument/2006/relationships">
   <p:cSld>
     <p:spTree>
@@ -14532,6 +13861,395 @@
                 <a:ea typeface="微软雅黑"/>
                 <a:cs typeface="Arial"/>
               </a:rPr>
+              <a:t>23 / 24</a:t>
+            </a:r>
+          </a:p>
+        </p:txBody>
+      </p:sp>
+    </p:spTree>
+  </p:cSld>
+  <p:clrMapOvr>
+    <a:masterClrMapping/>
+  </p:clrMapOvr>
+</p:sld>
+</file>
+
+<file path=ppt/slides/slide24.xml><?xml version="1.0" encoding="utf-8"?>
+<p:sld xmlns:a="http://schemas.openxmlformats.org/drawingml/2006/main" xmlns:p="http://schemas.openxmlformats.org/presentationml/2006/main" xmlns:r="http://schemas.openxmlformats.org/officeDocument/2006/relationships">
+  <p:cSld>
+    <p:spTree>
+      <p:nvGrpSpPr>
+        <p:cNvPr id="1" name=""/>
+        <p:cNvGrpSpPr/>
+        <p:nvPr/>
+      </p:nvGrpSpPr>
+      <p:grpSpPr/>
+      <p:sp>
+        <p:nvSpPr>
+          <p:cNvPr id="2" name="TextBox 1"/>
+          <p:cNvSpPr txBox="1"/>
+          <p:nvPr/>
+        </p:nvSpPr>
+        <p:spPr>
+          <a:xfrm>
+            <a:off x="640080" y="365760"/>
+            <a:ext cx="10908792" cy="548640"/>
+          </a:xfrm>
+          <a:prstGeom prst="rect">
+            <a:avLst/>
+          </a:prstGeom>
+          <a:noFill/>
+        </p:spPr>
+        <p:txBody>
+          <a:bodyPr wrap="square" anchor="t" lIns="27432" rIns="27432" tIns="0" bIns="0">
+            <a:spAutoFit/>
+          </a:bodyPr>
+          <a:lstStyle/>
+          <a:p>
+            <a:pPr algn="l">
+              <a:lnSpc>
+                <a:spcPct val="100000"/>
+              </a:lnSpc>
+              <a:spcBef>
+                <a:spcPts val="0"/>
+              </a:spcBef>
+              <a:spcAft>
+                <a:spcPts val="0"/>
+              </a:spcAft>
+            </a:pPr>
+            <a:r>
+              <a:rPr sz="2500" b="1">
+                <a:solidFill>
+                  <a:srgbClr val="111111"/>
+                </a:solidFill>
+                <a:latin typeface="Arial"/>
+                <a:ea typeface="微软雅黑"/>
+                <a:cs typeface="Arial"/>
+              </a:rPr>
+              <a:t>主要分析已完成，剩余工作风险可控</a:t>
+            </a:r>
+          </a:p>
+        </p:txBody>
+      </p:sp>
+      <p:sp>
+        <p:nvSpPr>
+          <p:cNvPr id="3" name="Rectangle 2"/>
+          <p:cNvSpPr/>
+          <p:nvPr/>
+        </p:nvSpPr>
+        <p:spPr>
+          <a:xfrm>
+            <a:off x="640080" y="969264"/>
+            <a:ext cx="10908792" cy="12700"/>
+          </a:xfrm>
+          <a:prstGeom prst="rect">
+            <a:avLst/>
+          </a:prstGeom>
+          <a:solidFill>
+            <a:srgbClr val="DDDDDA"/>
+          </a:solidFill>
+          <a:ln>
+            <a:noFill/>
+          </a:ln>
+          <a:effectLst/>
+        </p:spPr>
+        <p:style>
+          <a:lnRef idx="1">
+            <a:schemeClr val="accent1"/>
+          </a:lnRef>
+          <a:fillRef idx="3">
+            <a:schemeClr val="accent1"/>
+          </a:fillRef>
+          <a:effectRef idx="2">
+            <a:schemeClr val="accent1"/>
+          </a:effectRef>
+          <a:fontRef idx="minor">
+            <a:schemeClr val="lt1"/>
+          </a:fontRef>
+        </p:style>
+        <p:txBody>
+          <a:bodyPr rtlCol="0" anchor="ctr"/>
+          <a:lstStyle/>
+          <a:p>
+            <a:pPr algn="ctr"/>
+          </a:p>
+        </p:txBody>
+      </p:sp>
+      <p:sp>
+        <p:nvSpPr>
+          <p:cNvPr id="4" name="TextBox 3"/>
+          <p:cNvSpPr txBox="1"/>
+          <p:nvPr/>
+        </p:nvSpPr>
+        <p:spPr>
+          <a:xfrm>
+            <a:off x="640080" y="1481328"/>
+            <a:ext cx="10424160" cy="3291840"/>
+          </a:xfrm>
+          <a:prstGeom prst="rect">
+            <a:avLst/>
+          </a:prstGeom>
+          <a:noFill/>
+        </p:spPr>
+        <p:txBody>
+          <a:bodyPr wrap="square" anchor="t" lIns="27432" rIns="27432" tIns="0" bIns="0">
+            <a:spAutoFit/>
+          </a:bodyPr>
+          <a:lstStyle/>
+          <a:p>
+            <a:pPr algn="l">
+              <a:lnSpc>
+                <a:spcPct val="134000"/>
+              </a:lnSpc>
+              <a:spcBef>
+                <a:spcPts val="0"/>
+              </a:spcBef>
+              <a:spcAft>
+                <a:spcPts val="0"/>
+              </a:spcAft>
+            </a:pPr>
+            <a:r>
+              <a:rPr sz="1800" b="0">
+                <a:solidFill>
+                  <a:srgbClr val="333333"/>
+                </a:solidFill>
+                <a:latin typeface="Arial"/>
+                <a:ea typeface="微软雅黑"/>
+                <a:cs typeface="Arial"/>
+              </a:rPr>
+              <a:t>确认事实：数据资源、短肽库、三模型共识预测、分阶段差异分析与特有抗菌肽筛选均已完成。</a:t>
+            </a:r>
+          </a:p>
+          <a:p>
+            <a:pPr algn="l">
+              <a:lnSpc>
+                <a:spcPct val="134000"/>
+              </a:lnSpc>
+              <a:spcBef>
+                <a:spcPts val="1400"/>
+              </a:spcBef>
+              <a:spcAft>
+                <a:spcPts val="0"/>
+              </a:spcAft>
+            </a:pPr>
+            <a:r>
+              <a:rPr sz="1800" b="0">
+                <a:solidFill>
+                  <a:srgbClr val="333333"/>
+                </a:solidFill>
+                <a:latin typeface="Arial"/>
+                <a:ea typeface="微软雅黑"/>
+                <a:cs typeface="Arial"/>
+              </a:rPr>
+              <a:t>待完成：机制关联分析的结论整理、候选抗菌肽的抑菌实验验证，以及学位论文与投稿论文撰写。</a:t>
+            </a:r>
+          </a:p>
+          <a:p>
+            <a:pPr algn="l">
+              <a:lnSpc>
+                <a:spcPct val="134000"/>
+              </a:lnSpc>
+              <a:spcBef>
+                <a:spcPts val="1400"/>
+              </a:spcBef>
+              <a:spcAft>
+                <a:spcPts val="0"/>
+              </a:spcAft>
+            </a:pPr>
+            <a:r>
+              <a:rPr sz="1800" b="0">
+                <a:solidFill>
+                  <a:srgbClr val="333333"/>
+                </a:solidFill>
+                <a:latin typeface="Arial"/>
+                <a:ea typeface="微软雅黑"/>
+                <a:cs typeface="Arial"/>
+              </a:rPr>
+              <a:t>进度安排：按开题计划推进，后续不依赖新的数据生产。</a:t>
+            </a:r>
+          </a:p>
+        </p:txBody>
+      </p:sp>
+      <p:sp>
+        <p:nvSpPr>
+          <p:cNvPr id="5" name="Rectangle 4"/>
+          <p:cNvSpPr/>
+          <p:nvPr/>
+        </p:nvSpPr>
+        <p:spPr>
+          <a:xfrm>
+            <a:off x="640080" y="4846320"/>
+            <a:ext cx="1920240" cy="30480"/>
+          </a:xfrm>
+          <a:prstGeom prst="rect">
+            <a:avLst/>
+          </a:prstGeom>
+          <a:solidFill>
+            <a:srgbClr val="B03A2E"/>
+          </a:solidFill>
+          <a:ln>
+            <a:noFill/>
+          </a:ln>
+          <a:effectLst/>
+        </p:spPr>
+        <p:style>
+          <a:lnRef idx="1">
+            <a:schemeClr val="accent1"/>
+          </a:lnRef>
+          <a:fillRef idx="3">
+            <a:schemeClr val="accent1"/>
+          </a:fillRef>
+          <a:effectRef idx="2">
+            <a:schemeClr val="accent1"/>
+          </a:effectRef>
+          <a:fontRef idx="minor">
+            <a:schemeClr val="lt1"/>
+          </a:fontRef>
+        </p:style>
+        <p:txBody>
+          <a:bodyPr rtlCol="0" anchor="ctr"/>
+          <a:lstStyle/>
+          <a:p>
+            <a:pPr algn="ctr"/>
+          </a:p>
+        </p:txBody>
+      </p:sp>
+      <p:sp>
+        <p:nvSpPr>
+          <p:cNvPr id="6" name="TextBox 5"/>
+          <p:cNvSpPr txBox="1"/>
+          <p:nvPr/>
+        </p:nvSpPr>
+        <p:spPr>
+          <a:xfrm>
+            <a:off x="640080" y="5084064"/>
+            <a:ext cx="10424160" cy="731520"/>
+          </a:xfrm>
+          <a:prstGeom prst="rect">
+            <a:avLst/>
+          </a:prstGeom>
+          <a:noFill/>
+        </p:spPr>
+        <p:txBody>
+          <a:bodyPr wrap="square" anchor="t" lIns="27432" rIns="27432" tIns="0" bIns="0">
+            <a:spAutoFit/>
+          </a:bodyPr>
+          <a:lstStyle/>
+          <a:p>
+            <a:pPr algn="l">
+              <a:lnSpc>
+                <a:spcPct val="110000"/>
+              </a:lnSpc>
+              <a:spcBef>
+                <a:spcPts val="0"/>
+              </a:spcBef>
+              <a:spcAft>
+                <a:spcPts val="0"/>
+              </a:spcAft>
+            </a:pPr>
+            <a:r>
+              <a:rPr sz="2000" b="1">
+                <a:solidFill>
+                  <a:srgbClr val="111111"/>
+                </a:solidFill>
+                <a:latin typeface="Arial"/>
+                <a:ea typeface="微软雅黑"/>
+                <a:cs typeface="Arial"/>
+              </a:rPr>
+              <a:t>谢谢各位老师，请批评指正。</a:t>
+            </a:r>
+          </a:p>
+        </p:txBody>
+      </p:sp>
+      <p:sp>
+        <p:nvSpPr>
+          <p:cNvPr id="7" name="TextBox 6"/>
+          <p:cNvSpPr txBox="1"/>
+          <p:nvPr/>
+        </p:nvSpPr>
+        <p:spPr>
+          <a:xfrm>
+            <a:off x="640080" y="6419088"/>
+            <a:ext cx="8778240" cy="310896"/>
+          </a:xfrm>
+          <a:prstGeom prst="rect">
+            <a:avLst/>
+          </a:prstGeom>
+          <a:noFill/>
+        </p:spPr>
+        <p:txBody>
+          <a:bodyPr wrap="square" anchor="t" lIns="27432" rIns="27432" tIns="0" bIns="0">
+            <a:spAutoFit/>
+          </a:bodyPr>
+          <a:lstStyle/>
+          <a:p>
+            <a:pPr algn="l">
+              <a:lnSpc>
+                <a:spcPct val="100000"/>
+              </a:lnSpc>
+              <a:spcBef>
+                <a:spcPts val="0"/>
+              </a:spcBef>
+              <a:spcAft>
+                <a:spcPts val="0"/>
+              </a:spcAft>
+            </a:pPr>
+            <a:r>
+              <a:rPr sz="1500" b="0">
+                <a:solidFill>
+                  <a:srgbClr val="777777"/>
+                </a:solidFill>
+                <a:latin typeface="Arial"/>
+                <a:ea typeface="微软雅黑"/>
+                <a:cs typeface="Arial"/>
+              </a:rPr>
+              <a:t>研究生论文中期检查 · 文绍华</a:t>
+            </a:r>
+          </a:p>
+        </p:txBody>
+      </p:sp>
+      <p:sp>
+        <p:nvSpPr>
+          <p:cNvPr id="8" name="TextBox 7"/>
+          <p:cNvSpPr txBox="1"/>
+          <p:nvPr/>
+        </p:nvSpPr>
+        <p:spPr>
+          <a:xfrm>
+            <a:off x="10058400" y="6419088"/>
+            <a:ext cx="1490472" cy="310896"/>
+          </a:xfrm>
+          <a:prstGeom prst="rect">
+            <a:avLst/>
+          </a:prstGeom>
+          <a:noFill/>
+        </p:spPr>
+        <p:txBody>
+          <a:bodyPr wrap="square" anchor="t" lIns="27432" rIns="27432" tIns="0" bIns="0">
+            <a:spAutoFit/>
+          </a:bodyPr>
+          <a:lstStyle/>
+          <a:p>
+            <a:pPr algn="r">
+              <a:lnSpc>
+                <a:spcPct val="100000"/>
+              </a:lnSpc>
+              <a:spcBef>
+                <a:spcPts val="0"/>
+              </a:spcBef>
+              <a:spcAft>
+                <a:spcPts val="0"/>
+              </a:spcAft>
+            </a:pPr>
+            <a:r>
+              <a:rPr sz="1500" b="0">
+                <a:solidFill>
+                  <a:srgbClr val="777777"/>
+                </a:solidFill>
+                <a:latin typeface="Arial"/>
+                <a:ea typeface="微软雅黑"/>
+                <a:cs typeface="Arial"/>
+              </a:rPr>
               <a:t>24 / 24</a:t>
             </a:r>
           </a:p>
@@ -16165,8 +15883,8 @@
                 <a:ea typeface="微软雅黑"/>
                 <a:cs typeface="Arial"/>
               </a:rPr>
-              <a:t>双端鸟枪法测序
-质控与去宿主</a:t>
+              <a:t>fastp 质控
+KneadData 去宿主</a:t>
             </a:r>
           </a:p>
         </p:txBody>
@@ -16354,8 +16072,9 @@
                 <a:ea typeface="微软雅黑"/>
                 <a:cs typeface="Arial"/>
               </a:rPr>
-              <a:t>序列组装与分箱
-分箱提纯</a:t>
+              <a:t>MEGAHIT 组装
+MetaBAT2 分箱
+CONCOCT 分箱</a:t>
             </a:r>
           </a:p>
         </p:txBody>
@@ -16543,8 +16262,8 @@
                 <a:ea typeface="微软雅黑"/>
                 <a:cs typeface="Arial"/>
               </a:rPr>
-              <a:t>种水平去冗余
-非冗余参考集</a:t>
+              <a:t>metaWRAP 提纯
+dRep 去冗余</a:t>
             </a:r>
           </a:p>
         </p:txBody>
@@ -16732,7 +16451,7 @@
                 <a:ea typeface="微软雅黑"/>
                 <a:cs typeface="Arial"/>
               </a:rPr>
-              <a:t>小开放阅读框
+              <a:t>EMBOSS getorf
 长度 5—50 aa</a:t>
             </a:r>
           </a:p>
@@ -16921,7 +16640,7 @@
                 <a:ea typeface="微软雅黑"/>
                 <a:cs typeface="Arial"/>
               </a:rPr>
-              <a:t>序列级去冗余
+              <a:t>序列级精确去冗余
 非冗余短肽库</a:t>
             </a:r>
           </a:p>
@@ -17110,8 +16829,8 @@
                 <a:ea typeface="微软雅黑"/>
                 <a:cs typeface="Arial"/>
               </a:rPr>
-              <a:t>多模型独立预测
-一致阳性才纳入</a:t>
+              <a:t>Attention / LSTM
+/ BERT 一致阳性</a:t>
             </a:r>
           </a:p>
         </p:txBody>
@@ -17299,8 +17018,9 @@
                 <a:ea typeface="微软雅黑"/>
                 <a:cs typeface="Arial"/>
               </a:rPr>
-              <a:t>按五个认知阶段
-比较组成与丰度</a:t>
+              <a:t>CoverM 定量
+CLR 变换
+Kruskal-Wallis</a:t>
             </a:r>
           </a:p>
         </p:txBody>
@@ -17488,7 +17208,7 @@
                 <a:ea typeface="微软雅黑"/>
                 <a:cs typeface="Arial"/>
               </a:rPr>
-              <a:t>蛋白组二次去重
+              <a:t>宏蛋白组二次去重
 剔除无表达序列</a:t>
             </a:r>
           </a:p>
@@ -17866,7 +17586,7 @@
                 <a:ea typeface="微软雅黑"/>
                 <a:cs typeface="Arial"/>
               </a:rPr>
-              <a:t>对接与动力学
+              <a:t>分子对接 + 动力学
 给出候选优先序</a:t>
             </a:r>
           </a:p>
@@ -18055,9 +17775,8 @@
                 <a:ea typeface="微软雅黑"/>
                 <a:cs typeface="Arial"/>
               </a:rPr>
-              <a:t>合成代表性肽
-纸片扩散法筛查
-肉汤稀释法 MIC</a:t>
+              <a:t>纸片扩散法筛查
+微量肉汤稀释法 MIC</a:t>
             </a:r>
           </a:p>
         </p:txBody>
@@ -18758,7 +18477,7 @@
                 <a:ea typeface="微软雅黑"/>
                 <a:cs typeface="Arial"/>
               </a:rPr>
-              <a:t>5 个阶段</a:t>
+              <a:t>265 例</a:t>
             </a:r>
           </a:p>
         </p:txBody>
@@ -18805,7 +18524,7 @@
                 <a:ea typeface="微软雅黑"/>
                 <a:cs typeface="Arial"/>
               </a:rPr>
-              <a:t>NC · SCS · SCD · MCI · AD</a:t>
+              <a:t>匹配亚队列 · 各阶段 53 例</a:t>
             </a:r>
           </a:p>
         </p:txBody>
@@ -18852,7 +18571,7 @@
                 <a:ea typeface="微软雅黑"/>
                 <a:cs typeface="Arial"/>
               </a:rPr>
-              <a:t>2 个性别</a:t>
+              <a:t>53 例</a:t>
             </a:r>
           </a:p>
         </p:txBody>
@@ -18899,7 +18618,7 @@
                 <a:ea typeface="微软雅黑"/>
                 <a:cs typeface="Arial"/>
               </a:rPr>
-              <a:t>男女分别匹配</a:t>
+              <a:t>每阶段样本量 · 每组 35 女 / 18 男</a:t>
             </a:r>
           </a:p>
         </p:txBody>
@@ -19040,7 +18759,7 @@
                 <a:ea typeface="微软雅黑"/>
                 <a:cs typeface="Arial"/>
               </a:rPr>
-              <a:t>30 个分层单元</a:t>
+              <a:t>68.2—70.0 岁</a:t>
             </a:r>
           </a:p>
         </p:txBody>
@@ -19087,7 +18806,7 @@
                 <a:ea typeface="微软雅黑"/>
                 <a:cs typeface="Arial"/>
               </a:rPr>
-              <a:t>阶段 × 性别 × 年龄</a:t>
+              <a:t>各阶段平均年龄 · 组间差 ≤1.8 岁</a:t>
             </a:r>
           </a:p>
         </p:txBody>
@@ -19188,8 +18907,8 @@
         </p:nvSpPr>
         <p:spPr>
           <a:xfrm>
-            <a:off x="640080" y="3017520"/>
-            <a:ext cx="1998878" cy="365760"/>
+            <a:off x="640080" y="2999232"/>
+            <a:ext cx="1998878" cy="310896"/>
           </a:xfrm>
           <a:prstGeom prst="rect">
             <a:avLst/>
@@ -19235,8 +18954,8 @@
         </p:nvSpPr>
         <p:spPr>
           <a:xfrm>
-            <a:off x="640080" y="3383280"/>
-            <a:ext cx="1998878" cy="1005840"/>
+            <a:off x="640080" y="3310128"/>
+            <a:ext cx="1998878" cy="1097280"/>
           </a:xfrm>
           <a:prstGeom prst="rect">
             <a:avLst/>
@@ -19251,7 +18970,7 @@
           <a:p>
             <a:pPr algn="l">
               <a:lnSpc>
-                <a:spcPct val="116000"/>
+                <a:spcPct val="114000"/>
               </a:lnSpc>
               <a:spcBef>
                 <a:spcPts val="0"/>
@@ -19275,7 +18994,7 @@
           <a:p>
             <a:pPr algn="l">
               <a:lnSpc>
-                <a:spcPct val="116000"/>
+                <a:spcPct val="114000"/>
               </a:lnSpc>
               <a:spcBef>
                 <a:spcPts val="300"/>
@@ -19287,19 +19006,19 @@
             <a:r>
               <a:rPr sz="1500" b="0">
                 <a:solidFill>
-                  <a:srgbClr val="333333"/>
-                </a:solidFill>
-                <a:latin typeface="Arial"/>
-                <a:ea typeface="微软雅黑"/>
-                <a:cs typeface="Arial"/>
-              </a:rPr>
-              <a:t>菌群多样性最高</a:t>
+                  <a:srgbClr val="2F5D62"/>
+                </a:solidFill>
+                <a:latin typeface="Arial"/>
+                <a:ea typeface="微软雅黑"/>
+                <a:cs typeface="Arial"/>
+              </a:rPr>
+              <a:t>53 例 ｜ 35 女 / 18 男</a:t>
             </a:r>
           </a:p>
           <a:p>
             <a:pPr algn="l">
               <a:lnSpc>
-                <a:spcPct val="116000"/>
+                <a:spcPct val="114000"/>
               </a:lnSpc>
               <a:spcBef>
                 <a:spcPts val="300"/>
@@ -19317,7 +19036,7 @@
                 <a:ea typeface="微软雅黑"/>
                 <a:cs typeface="Arial"/>
               </a:rPr>
-              <a:t>作为比较基线</a:t>
+              <a:t>平均 68.4 岁 · 多样性最高</a:t>
             </a:r>
           </a:p>
         </p:txBody>
@@ -19374,8 +19093,8 @@
         </p:nvSpPr>
         <p:spPr>
           <a:xfrm>
-            <a:off x="2821838" y="3017520"/>
-            <a:ext cx="1998878" cy="365760"/>
+            <a:off x="2821838" y="2999232"/>
+            <a:ext cx="1998878" cy="310896"/>
           </a:xfrm>
           <a:prstGeom prst="rect">
             <a:avLst/>
@@ -19421,8 +19140,8 @@
         </p:nvSpPr>
         <p:spPr>
           <a:xfrm>
-            <a:off x="2821838" y="3383280"/>
-            <a:ext cx="1998878" cy="1005840"/>
+            <a:off x="2821838" y="3310128"/>
+            <a:ext cx="1998878" cy="1097280"/>
           </a:xfrm>
           <a:prstGeom prst="rect">
             <a:avLst/>
@@ -19437,7 +19156,7 @@
           <a:p>
             <a:pPr algn="l">
               <a:lnSpc>
-                <a:spcPct val="116000"/>
+                <a:spcPct val="114000"/>
               </a:lnSpc>
               <a:spcBef>
                 <a:spcPts val="0"/>
@@ -19461,7 +19180,7 @@
           <a:p>
             <a:pPr algn="l">
               <a:lnSpc>
-                <a:spcPct val="116000"/>
+                <a:spcPct val="114000"/>
               </a:lnSpc>
               <a:spcBef>
                 <a:spcPts val="300"/>
@@ -19473,19 +19192,19 @@
             <a:r>
               <a:rPr sz="1500" b="0">
                 <a:solidFill>
-                  <a:srgbClr val="333333"/>
-                </a:solidFill>
-                <a:latin typeface="Arial"/>
-                <a:ea typeface="微软雅黑"/>
-                <a:cs typeface="Arial"/>
-              </a:rPr>
-              <a:t>组成已出现偏移</a:t>
+                  <a:srgbClr val="2F5D62"/>
+                </a:solidFill>
+                <a:latin typeface="Arial"/>
+                <a:ea typeface="微软雅黑"/>
+                <a:cs typeface="Arial"/>
+              </a:rPr>
+              <a:t>53 例 ｜ 35 女 / 18 男</a:t>
             </a:r>
           </a:p>
           <a:p>
             <a:pPr algn="l">
               <a:lnSpc>
-                <a:spcPct val="116000"/>
+                <a:spcPct val="114000"/>
               </a:lnSpc>
               <a:spcBef>
                 <a:spcPts val="300"/>
@@ -19503,7 +19222,7 @@
                 <a:ea typeface="微软雅黑"/>
                 <a:cs typeface="Arial"/>
               </a:rPr>
-              <a:t>阶段特有菌属出现</a:t>
+              <a:t>平均 68.2 岁 · 组成偏移</a:t>
             </a:r>
           </a:p>
         </p:txBody>
@@ -19560,8 +19279,8 @@
         </p:nvSpPr>
         <p:spPr>
           <a:xfrm>
-            <a:off x="5003596" y="3017520"/>
-            <a:ext cx="1998878" cy="365760"/>
+            <a:off x="5003596" y="2999232"/>
+            <a:ext cx="1998878" cy="310896"/>
           </a:xfrm>
           <a:prstGeom prst="rect">
             <a:avLst/>
@@ -19607,8 +19326,8 @@
         </p:nvSpPr>
         <p:spPr>
           <a:xfrm>
-            <a:off x="5003596" y="3383280"/>
-            <a:ext cx="1998878" cy="1005840"/>
+            <a:off x="5003596" y="3310128"/>
+            <a:ext cx="1998878" cy="1097280"/>
           </a:xfrm>
           <a:prstGeom prst="rect">
             <a:avLst/>
@@ -19623,7 +19342,7 @@
           <a:p>
             <a:pPr algn="l">
               <a:lnSpc>
-                <a:spcPct val="116000"/>
+                <a:spcPct val="114000"/>
               </a:lnSpc>
               <a:spcBef>
                 <a:spcPts val="0"/>
@@ -19647,7 +19366,7 @@
           <a:p>
             <a:pPr algn="l">
               <a:lnSpc>
-                <a:spcPct val="116000"/>
+                <a:spcPct val="114000"/>
               </a:lnSpc>
               <a:spcBef>
                 <a:spcPts val="300"/>
@@ -19659,19 +19378,19 @@
             <a:r>
               <a:rPr sz="1500" b="0">
                 <a:solidFill>
-                  <a:srgbClr val="333333"/>
-                </a:solidFill>
-                <a:latin typeface="Arial"/>
-                <a:ea typeface="微软雅黑"/>
-                <a:cs typeface="Arial"/>
-              </a:rPr>
-              <a:t>肠屏障标志物升高</a:t>
+                  <a:srgbClr val="2F5D62"/>
+                </a:solidFill>
+                <a:latin typeface="Arial"/>
+                <a:ea typeface="微软雅黑"/>
+                <a:cs typeface="Arial"/>
+              </a:rPr>
+              <a:t>53 例 ｜ 35 女 / 18 男</a:t>
             </a:r>
           </a:p>
           <a:p>
             <a:pPr algn="l">
               <a:lnSpc>
-                <a:spcPct val="116000"/>
+                <a:spcPct val="114000"/>
               </a:lnSpc>
               <a:spcBef>
                 <a:spcPts val="300"/>
@@ -19689,7 +19408,7 @@
                 <a:ea typeface="微软雅黑"/>
                 <a:cs typeface="Arial"/>
               </a:rPr>
-              <a:t>改变早于痴呆</a:t>
+              <a:t>平均 69.1 岁 · 屏障标志↑</a:t>
             </a:r>
           </a:p>
         </p:txBody>
@@ -19746,8 +19465,8 @@
         </p:nvSpPr>
         <p:spPr>
           <a:xfrm>
-            <a:off x="7185355" y="3017520"/>
-            <a:ext cx="1998878" cy="365760"/>
+            <a:off x="7185355" y="2999232"/>
+            <a:ext cx="1998878" cy="310896"/>
           </a:xfrm>
           <a:prstGeom prst="rect">
             <a:avLst/>
@@ -19793,8 +19512,8 @@
         </p:nvSpPr>
         <p:spPr>
           <a:xfrm>
-            <a:off x="7185355" y="3383280"/>
-            <a:ext cx="1998878" cy="1005840"/>
+            <a:off x="7185355" y="3310128"/>
+            <a:ext cx="1998878" cy="1097280"/>
           </a:xfrm>
           <a:prstGeom prst="rect">
             <a:avLst/>
@@ -19809,7 +19528,7 @@
           <a:p>
             <a:pPr algn="l">
               <a:lnSpc>
-                <a:spcPct val="116000"/>
+                <a:spcPct val="114000"/>
               </a:lnSpc>
               <a:spcBef>
                 <a:spcPts val="0"/>
@@ -19833,7 +19552,7 @@
           <a:p>
             <a:pPr algn="l">
               <a:lnSpc>
-                <a:spcPct val="116000"/>
+                <a:spcPct val="114000"/>
               </a:lnSpc>
               <a:spcBef>
                 <a:spcPts val="300"/>
@@ -19845,19 +19564,19 @@
             <a:r>
               <a:rPr sz="1500" b="0">
                 <a:solidFill>
-                  <a:srgbClr val="333333"/>
-                </a:solidFill>
-                <a:latin typeface="Arial"/>
-                <a:ea typeface="微软雅黑"/>
-                <a:cs typeface="Arial"/>
-              </a:rPr>
-              <a:t>菌群失衡最明显</a:t>
+                  <a:srgbClr val="2F5D62"/>
+                </a:solidFill>
+                <a:latin typeface="Arial"/>
+                <a:ea typeface="微软雅黑"/>
+                <a:cs typeface="Arial"/>
+              </a:rPr>
+              <a:t>53 例 ｜ 35 女 / 18 男</a:t>
             </a:r>
           </a:p>
           <a:p>
             <a:pPr algn="l">
               <a:lnSpc>
-                <a:spcPct val="116000"/>
+                <a:spcPct val="114000"/>
               </a:lnSpc>
               <a:spcBef>
                 <a:spcPts val="300"/>
@@ -19875,7 +19594,7 @@
                 <a:ea typeface="微软雅黑"/>
                 <a:cs typeface="Arial"/>
               </a:rPr>
-              <a:t>与炎症指标相关</a:t>
+              <a:t>平均 68.8 岁 · 失衡最明显</a:t>
             </a:r>
           </a:p>
         </p:txBody>
@@ -19932,8 +19651,8 @@
         </p:nvSpPr>
         <p:spPr>
           <a:xfrm>
-            <a:off x="9367113" y="3017520"/>
-            <a:ext cx="1998878" cy="365760"/>
+            <a:off x="9367113" y="2999232"/>
+            <a:ext cx="1998878" cy="310896"/>
           </a:xfrm>
           <a:prstGeom prst="rect">
             <a:avLst/>
@@ -19979,8 +19698,8 @@
         </p:nvSpPr>
         <p:spPr>
           <a:xfrm>
-            <a:off x="9367113" y="3383280"/>
-            <a:ext cx="1998878" cy="1005840"/>
+            <a:off x="9367113" y="3310128"/>
+            <a:ext cx="1998878" cy="1097280"/>
           </a:xfrm>
           <a:prstGeom prst="rect">
             <a:avLst/>
@@ -19995,7 +19714,7 @@
           <a:p>
             <a:pPr algn="l">
               <a:lnSpc>
-                <a:spcPct val="116000"/>
+                <a:spcPct val="114000"/>
               </a:lnSpc>
               <a:spcBef>
                 <a:spcPts val="0"/>
@@ -20019,7 +19738,7 @@
           <a:p>
             <a:pPr algn="l">
               <a:lnSpc>
-                <a:spcPct val="116000"/>
+                <a:spcPct val="114000"/>
               </a:lnSpc>
               <a:spcBef>
                 <a:spcPts val="300"/>
@@ -20031,19 +19750,19 @@
             <a:r>
               <a:rPr sz="1500" b="0">
                 <a:solidFill>
-                  <a:srgbClr val="333333"/>
-                </a:solidFill>
-                <a:latin typeface="Arial"/>
-                <a:ea typeface="微软雅黑"/>
-                <a:cs typeface="Arial"/>
-              </a:rPr>
-              <a:t>菌群变化幅度最大</a:t>
+                  <a:srgbClr val="2F5D62"/>
+                </a:solidFill>
+                <a:latin typeface="Arial"/>
+                <a:ea typeface="微软雅黑"/>
+                <a:cs typeface="Arial"/>
+              </a:rPr>
+              <a:t>53 例 ｜ 35 女 / 18 男</a:t>
             </a:r>
           </a:p>
           <a:p>
             <a:pPr algn="l">
               <a:lnSpc>
-                <a:spcPct val="116000"/>
+                <a:spcPct val="114000"/>
               </a:lnSpc>
               <a:spcBef>
                 <a:spcPts val="300"/>
@@ -20061,7 +19780,7 @@
                 <a:ea typeface="微软雅黑"/>
                 <a:cs typeface="Arial"/>
               </a:rPr>
-              <a:t>炎症—Aβ 环放大</a:t>
+              <a:t>平均 70.0 岁 · 变化幅度最大</a:t>
             </a:r>
           </a:p>
         </p:txBody>
@@ -20152,7 +19871,7 @@
                 <a:ea typeface="微软雅黑"/>
                 <a:cs typeface="Arial"/>
               </a:rPr>
-              <a:t>分层方式：5 个阶段 × 2 个性别 × 3 个年龄段（60—69、70—79、≥80 岁）= 30 个分层单元；每个单元内按年龄与性别匹配，得到结构一致的比较亚队列，保证阶段之间的差异不来自年龄与性别构成。</a:t>
+              <a:t>分层方式：5 个阶段 × 2 个性别 × 3 个年龄段（60—69、70—79、≥80 岁）= 30 个分层单元；每个单元内按年龄与性别匹配，最终选出 265 例匹配亚队列——各阶段 53 例、每组 35 女 / 18 男，组间平均年龄最大差 1.8 岁，保证阶段之间的差异不来自年龄与性别构成。</a:t>
             </a:r>
           </a:p>
         </p:txBody>
@@ -20165,8 +19884,8 @@
         </p:nvSpPr>
         <p:spPr>
           <a:xfrm>
-            <a:off x="640080" y="6053328"/>
-            <a:ext cx="10908792" cy="329184"/>
+            <a:off x="640080" y="6419088"/>
+            <a:ext cx="8778240" cy="310896"/>
           </a:xfrm>
           <a:prstGeom prst="rect">
             <a:avLst/>
@@ -20199,7 +19918,7 @@
                 <a:ea typeface="微软雅黑"/>
                 <a:cs typeface="Arial"/>
               </a:rPr>
-              <a:t>分组与分层依据：已完成的全队列临床信息表（sources/已完成1.docx）</a:t>
+              <a:t>研究生论文中期检查 · 文绍华</a:t>
             </a:r>
           </a:p>
         </p:txBody>
@@ -20207,53 +19926,6 @@
       <p:sp>
         <p:nvSpPr>
           <p:cNvPr id="32" name="TextBox 31"/>
-          <p:cNvSpPr txBox="1"/>
-          <p:nvPr/>
-        </p:nvSpPr>
-        <p:spPr>
-          <a:xfrm>
-            <a:off x="640080" y="6419088"/>
-            <a:ext cx="8778240" cy="310896"/>
-          </a:xfrm>
-          <a:prstGeom prst="rect">
-            <a:avLst/>
-          </a:prstGeom>
-          <a:noFill/>
-        </p:spPr>
-        <p:txBody>
-          <a:bodyPr wrap="square" anchor="t" lIns="27432" rIns="27432" tIns="0" bIns="0">
-            <a:spAutoFit/>
-          </a:bodyPr>
-          <a:lstStyle/>
-          <a:p>
-            <a:pPr algn="l">
-              <a:lnSpc>
-                <a:spcPct val="100000"/>
-              </a:lnSpc>
-              <a:spcBef>
-                <a:spcPts val="0"/>
-              </a:spcBef>
-              <a:spcAft>
-                <a:spcPts val="0"/>
-              </a:spcAft>
-            </a:pPr>
-            <a:r>
-              <a:rPr sz="1500" b="0">
-                <a:solidFill>
-                  <a:srgbClr val="777777"/>
-                </a:solidFill>
-                <a:latin typeface="Arial"/>
-                <a:ea typeface="微软雅黑"/>
-                <a:cs typeface="Arial"/>
-              </a:rPr>
-              <a:t>研究生论文中期检查 · 文绍华</a:t>
-            </a:r>
-          </a:p>
-        </p:txBody>
-      </p:sp>
-      <p:sp>
-        <p:nvSpPr>
-          <p:cNvPr id="33" name="TextBox 32"/>
           <p:cNvSpPr txBox="1"/>
           <p:nvPr/>
         </p:nvSpPr>
@@ -20486,8 +20158,8 @@
         </p:nvSpPr>
         <p:spPr>
           <a:xfrm>
-            <a:off x="640080" y="6053328"/>
-            <a:ext cx="10908792" cy="329184"/>
+            <a:off x="640080" y="6419088"/>
+            <a:ext cx="8778240" cy="310896"/>
           </a:xfrm>
           <a:prstGeom prst="rect">
             <a:avLst/>
@@ -20520,7 +20192,7 @@
                 <a:ea typeface="微软雅黑"/>
                 <a:cs typeface="Arial"/>
               </a:rPr>
-              <a:t>图：本项目自制（results/figures）</a:t>
+              <a:t>研究生论文中期检查 · 文绍华</a:t>
             </a:r>
           </a:p>
         </p:txBody>
@@ -20528,53 +20200,6 @@
       <p:sp>
         <p:nvSpPr>
           <p:cNvPr id="7" name="TextBox 6"/>
-          <p:cNvSpPr txBox="1"/>
-          <p:nvPr/>
-        </p:nvSpPr>
-        <p:spPr>
-          <a:xfrm>
-            <a:off x="640080" y="6419088"/>
-            <a:ext cx="8778240" cy="310896"/>
-          </a:xfrm>
-          <a:prstGeom prst="rect">
-            <a:avLst/>
-          </a:prstGeom>
-          <a:noFill/>
-        </p:spPr>
-        <p:txBody>
-          <a:bodyPr wrap="square" anchor="t" lIns="27432" rIns="27432" tIns="0" bIns="0">
-            <a:spAutoFit/>
-          </a:bodyPr>
-          <a:lstStyle/>
-          <a:p>
-            <a:pPr algn="l">
-              <a:lnSpc>
-                <a:spcPct val="100000"/>
-              </a:lnSpc>
-              <a:spcBef>
-                <a:spcPts val="0"/>
-              </a:spcBef>
-              <a:spcAft>
-                <a:spcPts val="0"/>
-              </a:spcAft>
-            </a:pPr>
-            <a:r>
-              <a:rPr sz="1500" b="0">
-                <a:solidFill>
-                  <a:srgbClr val="777777"/>
-                </a:solidFill>
-                <a:latin typeface="Arial"/>
-                <a:ea typeface="微软雅黑"/>
-                <a:cs typeface="Arial"/>
-              </a:rPr>
-              <a:t>研究生论文中期检查 · 文绍华</a:t>
-            </a:r>
-          </a:p>
-        </p:txBody>
-      </p:sp>
-      <p:sp>
-        <p:nvSpPr>
-          <p:cNvPr id="8" name="TextBox 7"/>
           <p:cNvSpPr txBox="1"/>
           <p:nvPr/>
         </p:nvSpPr>
@@ -21149,8 +20774,8 @@
         </p:nvSpPr>
         <p:spPr>
           <a:xfrm>
-            <a:off x="640080" y="6053328"/>
-            <a:ext cx="10908792" cy="329184"/>
+            <a:off x="640080" y="6419088"/>
+            <a:ext cx="8778240" cy="310896"/>
           </a:xfrm>
           <a:prstGeom prst="rect">
             <a:avLst/>
@@ -21183,7 +20808,7 @@
                 <a:ea typeface="微软雅黑"/>
                 <a:cs typeface="Arial"/>
               </a:rPr>
-              <a:t>图：本项目自制（results/figures）</a:t>
+              <a:t>研究生论文中期检查 · 文绍华</a:t>
             </a:r>
           </a:p>
         </p:txBody>
@@ -21191,53 +20816,6 @@
       <p:sp>
         <p:nvSpPr>
           <p:cNvPr id="8" name="TextBox 7"/>
-          <p:cNvSpPr txBox="1"/>
-          <p:nvPr/>
-        </p:nvSpPr>
-        <p:spPr>
-          <a:xfrm>
-            <a:off x="640080" y="6419088"/>
-            <a:ext cx="8778240" cy="310896"/>
-          </a:xfrm>
-          <a:prstGeom prst="rect">
-            <a:avLst/>
-          </a:prstGeom>
-          <a:noFill/>
-        </p:spPr>
-        <p:txBody>
-          <a:bodyPr wrap="square" anchor="t" lIns="27432" rIns="27432" tIns="0" bIns="0">
-            <a:spAutoFit/>
-          </a:bodyPr>
-          <a:lstStyle/>
-          <a:p>
-            <a:pPr algn="l">
-              <a:lnSpc>
-                <a:spcPct val="100000"/>
-              </a:lnSpc>
-              <a:spcBef>
-                <a:spcPts val="0"/>
-              </a:spcBef>
-              <a:spcAft>
-                <a:spcPts val="0"/>
-              </a:spcAft>
-            </a:pPr>
-            <a:r>
-              <a:rPr sz="1500" b="0">
-                <a:solidFill>
-                  <a:srgbClr val="777777"/>
-                </a:solidFill>
-                <a:latin typeface="Arial"/>
-                <a:ea typeface="微软雅黑"/>
-                <a:cs typeface="Arial"/>
-              </a:rPr>
-              <a:t>研究生论文中期检查 · 文绍华</a:t>
-            </a:r>
-          </a:p>
-        </p:txBody>
-      </p:sp>
-      <p:sp>
-        <p:nvSpPr>
-          <p:cNvPr id="9" name="TextBox 8"/>
           <p:cNvSpPr txBox="1"/>
           <p:nvPr/>
         </p:nvSpPr>

--- a/deliverable/中期答辩_最终版.pptx
+++ b/deliverable/中期答辩_最终版.pptx
@@ -665,7 +665,7 @@
           <a:lstStyle/>
           <a:p>
             <a:r>
-              <a:t>机制关联参照乙酰胆碱酯酶—β-淀粉样肽复合物分子模拟研究的思路，从三个方向考察：与 Aβ 的相互作用及其对聚集的影响、与 AChE 外周阴离子位点结合从而干扰成核的可能性，以及经免疫与炎症通路参与神经炎症的可能性。这部分把结论定位为线索发现，不夸大因果。</a:t>
+              <a:t>机制关联参照乙酰胆碱酯酶—β-淀粉样肽复合物分子模拟研究的思路，方向按致病方向设定：微生物来源的淀粉样蛋白与内毒素已有先例——FapC 与 CsgA 种子加速 Aβ 纤维化并在动物模型中加重病理，LPS 缩短成核滞后期并诱导斑块与 p-tau，LL-37 与 Aβ 形成异源团簇、生成更毒的聚集体。因此分析的是候选肽是否促进 Aβ 成核与聚集、是否经 AChE 外周阴离子位点推动成核、是否经免疫与炎症通路放大神经炎症，而不是去证明它抑制 AD；结论定位为线索发现与优先序。</a:t>
             </a:r>
           </a:p>
         </p:txBody>
@@ -1155,7 +1155,7 @@
           <a:lstStyle/>
           <a:p>
             <a:r>
-              <a:t>这页把抗菌肽与 AD 的关联拆成七环，并标出每一环的证据强度：蓝色是已有实验或临床证据，绿色是计算方法能给出候选与优先序的部分，橙色是本课题要回答或需要验证的部分。老师问任何一环，都能说清这一环目前的证据到什么程度。</a:t>
+              <a:t>这页把抗菌肽与 AD 的关联拆成七环，并标出每一环的证据强度：蓝色是已有实验或临床证据，绿色是计算方法能给出候选与优先序的部分，橙色是本课题要回答或需要验证的部分。第六环要特别说清楚：本课题验证的是致病方向——筛选出的候选抗菌肽是否像 FapC、CsgA 与 LL-37 那样推动 Aβ 成核聚集与神经炎症，而不是去证明它抑制 AD。老师问任何一环，都能说清这一环目前的证据到什么程度。</a:t>
             </a:r>
           </a:p>
         </p:txBody>
@@ -1365,7 +1365,7 @@
           <a:lstStyle/>
           <a:p>
             <a:r>
-              <a:t>机制落点参照 AChE–Aβ 复合物的分子动力学研究：Aβ 对接进 PAS 后，复合物在 1 微秒模拟中保持稳定，主要停留区段是 344—361，该区段紧邻 PAS 但不受双位点抑制剂的位阻。同一界面的其他实验证据包括：丙锭可阻断 AChE 诱导的聚集而催化位点抑制剂无效、PAS 负电荷触发 β-发夹构象、丁酰胆碱酯酶反向延缓纤维形成。由此提出三个假设，并用对接与动力学给出优先序。</a:t>
+              <a:t>机制落点参照 AChE–Aβ 复合物的分子动力学研究：Aβ 对接进 PAS 后，复合物在 1 微秒模拟中保持稳定，主要停留区段是 344—361，该区段紧邻 PAS 但不受双位点抑制剂的位阻。这一段界面既是 Aβ 成核的场所，也是候选抗菌肽最可能介入的位置。与按“抑制聚集”提问不同，本课题的动力学按致病方向设计——检验候选肽是否促进成核与聚集，这样设计的依据是微生物来源的淀粉样蛋白与内毒素已有直接先例：FapC 与 CsgA 种子催化 Aβ 纤维化并在动物模型中加重病理 [47][48]，LPS 缩短滞后期、其内毒素血症模型中 7—9 天出现 Aβ 斑块与 p-tau [49][50]，LL-37 与 Aβ40 形成异源团簇、生成更毒的聚集体并经 CLIC1 造成小鼠与猴模型的 AD 样病理 [6][53]。由此提出三个假设：H1 结合 PAS 与 344—361 促进成核与聚集、H2 结合 Aβ 生成区加速纤维化或推向更毒寡聚体、H3 在膜与小胶质水平放大炎症信号；验证路径是先用对接与动力学给出致病方向的优先序，再用 ThT 聚集动力学、电镜形态与细胞毒性实验给证据。</a:t>
             </a:r>
           </a:p>
         </p:txBody>
@@ -1505,7 +1505,7 @@
           <a:lstStyle/>
           <a:p>
             <a:r>
-              <a:t>这张表把老师提出的八个问题逐条列出，并给出答案要点与证据强度。需要说明的是：关联类结论的证据强度较高，方向类结论（谁更多、促进还是抑制）存在例外与条件依赖，因此标注为中；微生物源抗菌肽在 AD 中的变化属于待验证部分，正是本课题要补的一环。</a:t>
+              <a:t>这张表把老师提出的八个问题逐条列出，并给出答案要点与证据强度。需要说明两件事：第一，机制与动力学一律按致病方向表述——只问候选抗菌肽是否推动 AD，不写“抑制 AD”，抗菌活性放在第六问作为本职功能；第二，致病方向的体内外证据已经存在（细菌淀粉样蛋白、内毒素与 LL-37），但针对本课题筛出的候选肽仍属假设，因此标注为中—强；微生物源抗菌肽在 AD 中的变化正是本课题要补的一环。</a:t>
             </a:r>
           </a:p>
         </p:txBody>
@@ -1575,7 +1575,7 @@
           <a:lstStyle/>
           <a:p>
             <a:r>
-              <a:t>机制说明文档《抗菌肽与AD关联机制说明》共整理 46 条文献，覆盖 AD 与感染、宿主抗菌肽在 AD 中的变化、抗菌肽预测方法、菌群分期、AChE–Aβ 与交叉成核的分子模拟，以及作为反例的乳铁蛋白下降证据。这里列出其中十条代表性文献及其结论。</a:t>
+              <a:t>机制说明文档《抗菌肽与AD关联机制说明》共整理 58 条文献，覆盖 AD 与感染、宿主抗菌肽在 AD 中的变化、抗菌肽预测方法、菌群分期、AChE–Aβ 与交叉成核的分子模拟、细菌淀粉样蛋白与内毒素推动 Aβ 聚集的致病方向证据，以及作为反例的乳铁蛋白下降与α-防御素抑制纤维化的证据。这里列出其中十三条代表性文献及其结论。</a:t>
             </a:r>
           </a:p>
         </p:txBody>
@@ -6080,7 +6080,7 @@
                 <a:ea typeface="微软雅黑"/>
                 <a:cs typeface="Arial"/>
               </a:rPr>
-              <a:t>借鉴乙酰胆碱酯酶—β-淀粉样肽复合物分子模拟研究的思路：考察候选肽与 Aβ 的相互作用、与 AChE 外周阴离子位点的结合，以及经免疫与炎症通路参与神经炎症的可能性。定位为线索发现。</a:t>
+              <a:t>借鉴乙酰胆碱酯酶—β-淀粉样肽复合物分子模拟研究的思路，按致病方向考察：候选肽是否促进 Aβ 成核与聚集、是否经 AChE 外周阴离子位点推动成核、是否经免疫与炎症通路放大神经炎症；输出优先序，定位为线索发现。</a:t>
             </a:r>
           </a:p>
         </p:txBody>
@@ -9059,7 +9059,7 @@
                 <a:ea typeface="微软雅黑"/>
                 <a:cs typeface="Arial"/>
               </a:rPr>
-              <a:t>① AD 与感染相关、② 感染与炎症驱动抗菌肽与 Aβ 生成、③ Aβ 本身即抗菌肽；④ 抗菌活性可计算预测、⑤ AD 组特异抗菌肽随阶段变化、⑥ 双刃剑效应；⑦ 为什么 AD 更多与分子机制落点，是本课题要回答的部分。</a:t>
+              <a:t>① AD 与感染相关、② 炎症驱动抗菌肽与 Aβ 生成、③ Aβ 本身即抗菌肽；④ 抗菌活性可计算预测、⑤ 特异抗菌肽随阶段变化、⑥ 致病方向：促进 Aβ 聚集；⑦ 为什么 AD 更多与机制落点是本课题要回答的部分。</a:t>
             </a:r>
           </a:p>
         </p:txBody>
@@ -10462,7 +10462,7 @@
                 <a:ea typeface="微软雅黑"/>
                 <a:cs typeface="Arial"/>
               </a:rPr>
-              <a:t>分子机制（一）：AChE–Aβ 复合物的动力学要点</a:t>
+              <a:t>分子机制（一）：动力学如何验证候选肽的致病方向</a:t>
             </a:r>
           </a:p>
         </p:txBody>
@@ -10577,7 +10577,7 @@
                 <a:ea typeface="微软雅黑"/>
                 <a:cs typeface="Arial"/>
               </a:rPr>
-              <a:t>PAS 是 Aβ 聚集的成核中心：1 μs 模拟中复合物稳定，Aβ 主要停留于 344—361 区段，不受双位点抑制剂位阻 [31]；丙锭阻断 PAS 后聚集被抑制 [33]。</a:t>
+              <a:t>PAS 是 Aβ 的成核界面：1 μs 模拟中复合物稳定，Aβ 主要停留于 344—361 区段 [31]；本课题据此检验候选肽在这一界面是促进成核与聚集，还是把产物推向更毒的寡聚体。</a:t>
             </a:r>
           </a:p>
         </p:txBody>
@@ -10851,7 +10851,7 @@
                 <a:ea typeface="微软雅黑"/>
                 <a:cs typeface="Arial"/>
               </a:rPr>
-              <a:t>抗菌肽与 Aβ 结构兼容，可交叉成核，方向由界面与浓度决定 [36][37]；LL-37 以疏水作用封堵纤维延伸面 [38]，五肽库筛选可破坏 D23—K28 盐桥 [41]。</a:t>
+              <a:t>抗菌肽与 Aβ 结构兼容，可交叉成核 [36][37]；微生物来源的 FapC 与 CsgA 是先例：种子加速 Aβ 纤维化并在动物模型中加重病理 [47][48]；本课题按致病方向检验候选肽。</a:t>
             </a:r>
           </a:p>
         </p:txBody>
@@ -11819,7 +11819,7 @@
                           <a:ea typeface="微软雅黑"/>
                           <a:cs typeface="Arial"/>
                         </a:rPr>
-                        <a:t>⑤ 促进还是抑制</a:t>
+                        <a:t>⑤ 是否导致 AD（致病方向）</a:t>
                       </a:r>
                     </a:p>
                   </a:txBody>
@@ -11854,7 +11854,7 @@
                           <a:ea typeface="微软雅黑"/>
                           <a:cs typeface="Arial"/>
                         </a:rPr>
-                        <a:t>两者同时成立：低浓度抗菌，长期过量致病</a:t>
+                        <a:t>FapC/CsgA 加速 Aβ 纤维化；LPS 促斑块与 p-tau；LL-37 经 CLIC1 致 AD 样病理</a:t>
                       </a:r>
                     </a:p>
                   </a:txBody>
@@ -11924,7 +11924,7 @@
                           <a:ea typeface="微软雅黑"/>
                           <a:cs typeface="Arial"/>
                         </a:rPr>
-                        <a:t>[1][3][6][20]</a:t>
+                        <a:t>[6][47][49][53]</a:t>
                       </a:r>
                     </a:p>
                   </a:txBody>
@@ -11961,7 +11961,7 @@
                           <a:ea typeface="微软雅黑"/>
                           <a:cs typeface="Arial"/>
                         </a:rPr>
-                        <a:t>⑥ 抑制感染证据</a:t>
+                        <a:t>⑥ 抗菌活性（本职功能）</a:t>
                       </a:r>
                     </a:p>
                   </a:txBody>
@@ -11996,7 +11996,7 @@
                           <a:ea typeface="微软雅黑"/>
                           <a:cs typeface="Arial"/>
                         </a:rPr>
-                        <a:t>小鼠抗感染更强；纤维网捕获病原体</a:t>
+                        <a:t>小鼠抗感染更强；纤维网捕获病原体；不作为“抑制 AD”结论</a:t>
                       </a:r>
                     </a:p>
                   </a:txBody>
@@ -12578,7 +12578,7 @@
         </p:nvGraphicFramePr>
         <p:xfrm>
           <a:off x="640080" y="1234440"/>
-          <a:ext cx="10908792" cy="4626864"/>
+          <a:ext cx="10908792" cy="5376672"/>
         </p:xfrm>
         <a:graphic>
           <a:graphicData uri="http://schemas.openxmlformats.org/drawingml/2006/table">
@@ -12591,7 +12591,7 @@
                 <a:gridCol w="5623560"/>
                 <a:gridCol w="2587752"/>
               </a:tblGrid>
-              <a:tr h="420624">
+              <a:tr h="384048">
                 <a:tc>
                   <a:txBody>
                     <a:bodyPr/>
@@ -12698,7 +12698,7 @@
                   </a:tcPr>
                 </a:tc>
               </a:tr>
-              <a:tr h="420624">
+              <a:tr h="384048">
                 <a:tc>
                   <a:txBody>
                     <a:bodyPr/>
@@ -12805,7 +12805,7 @@
                   </a:tcPr>
                 </a:tc>
               </a:tr>
-              <a:tr h="420624">
+              <a:tr h="384048">
                 <a:tc>
                   <a:txBody>
                     <a:bodyPr/>
@@ -12912,7 +12912,7 @@
                   </a:tcPr>
                 </a:tc>
               </a:tr>
-              <a:tr h="420624">
+              <a:tr h="384048">
                 <a:tc>
                   <a:txBody>
                     <a:bodyPr/>
@@ -13019,7 +13019,7 @@
                   </a:tcPr>
                 </a:tc>
               </a:tr>
-              <a:tr h="420624">
+              <a:tr h="384048">
                 <a:tc>
                   <a:txBody>
                     <a:bodyPr/>
@@ -13126,7 +13126,7 @@
                   </a:tcPr>
                 </a:tc>
               </a:tr>
-              <a:tr h="420624">
+              <a:tr h="384048">
                 <a:tc>
                   <a:txBody>
                     <a:bodyPr/>
@@ -13233,7 +13233,7 @@
                   </a:tcPr>
                 </a:tc>
               </a:tr>
-              <a:tr h="420624">
+              <a:tr h="384048">
                 <a:tc>
                   <a:txBody>
                     <a:bodyPr/>
@@ -13340,7 +13340,7 @@
                   </a:tcPr>
                 </a:tc>
               </a:tr>
-              <a:tr h="420624">
+              <a:tr h="384048">
                 <a:tc>
                   <a:txBody>
                     <a:bodyPr/>
@@ -13447,7 +13447,7 @@
                   </a:tcPr>
                 </a:tc>
               </a:tr>
-              <a:tr h="420624">
+              <a:tr h="384048">
                 <a:tc>
                   <a:txBody>
                     <a:bodyPr/>
@@ -13554,7 +13554,7 @@
                   </a:tcPr>
                 </a:tc>
               </a:tr>
-              <a:tr h="420624">
+              <a:tr h="384048">
                 <a:tc>
                   <a:txBody>
                     <a:bodyPr/>
@@ -13661,7 +13661,7 @@
                   </a:tcPr>
                 </a:tc>
               </a:tr>
-              <a:tr h="420624">
+              <a:tr h="384048">
                 <a:tc>
                   <a:txBody>
                     <a:bodyPr/>
@@ -13758,6 +13758,327 @@
                           <a:cs typeface="Arial"/>
                         </a:rPr>
                         <a:t>J Alzheimers Dis [42]</a:t>
+                      </a:r>
+                    </a:p>
+                  </a:txBody>
+                  <a:tcPr marT="27432" marB="27432">
+                    <a:solidFill>
+                      <a:srgbClr val="FFFFFF"/>
+                    </a:solidFill>
+                  </a:tcPr>
+                </a:tc>
+              </a:tr>
+              <a:tr h="384048">
+                <a:tc>
+                  <a:txBody>
+                    <a:bodyPr/>
+                    <a:lstStyle/>
+                    <a:p>
+                      <a:pPr algn="l">
+                        <a:lnSpc>
+                          <a:spcPct val="105000"/>
+                        </a:lnSpc>
+                        <a:spcBef>
+                          <a:spcPts val="0"/>
+                        </a:spcBef>
+                        <a:spcAft>
+                          <a:spcPts val="0"/>
+                        </a:spcAft>
+                      </a:pPr>
+                      <a:r>
+                        <a:rPr sz="1500" b="0">
+                          <a:solidFill>
+                            <a:srgbClr val="111111"/>
+                          </a:solidFill>
+                          <a:latin typeface="Arial"/>
+                          <a:ea typeface="微软雅黑"/>
+                          <a:cs typeface="Arial"/>
+                        </a:rPr>
+                        <a:t>Javed 等 2020</a:t>
+                      </a:r>
+                    </a:p>
+                  </a:txBody>
+                  <a:tcPr marT="27432" marB="27432">
+                    <a:solidFill>
+                      <a:srgbClr val="FFFFFF"/>
+                    </a:solidFill>
+                  </a:tcPr>
+                </a:tc>
+                <a:tc>
+                  <a:txBody>
+                    <a:bodyPr/>
+                    <a:lstStyle/>
+                    <a:p>
+                      <a:pPr algn="l">
+                        <a:lnSpc>
+                          <a:spcPct val="105000"/>
+                        </a:lnSpc>
+                        <a:spcBef>
+                          <a:spcPts val="0"/>
+                        </a:spcBef>
+                        <a:spcAft>
+                          <a:spcPts val="0"/>
+                        </a:spcAft>
+                      </a:pPr>
+                      <a:r>
+                        <a:rPr sz="1500" b="0">
+                          <a:solidFill>
+                            <a:srgbClr val="333333"/>
+                          </a:solidFill>
+                          <a:latin typeface="Arial"/>
+                          <a:ea typeface="微软雅黑"/>
+                          <a:cs typeface="Arial"/>
+                        </a:rPr>
+                        <a:t>FapC 种子加速 Aβ 纤维化，斑马鱼中加重病理</a:t>
+                      </a:r>
+                    </a:p>
+                  </a:txBody>
+                  <a:tcPr marT="27432" marB="27432">
+                    <a:solidFill>
+                      <a:srgbClr val="FFFFFF"/>
+                    </a:solidFill>
+                  </a:tcPr>
+                </a:tc>
+                <a:tc>
+                  <a:txBody>
+                    <a:bodyPr/>
+                    <a:lstStyle/>
+                    <a:p>
+                      <a:pPr algn="l">
+                        <a:lnSpc>
+                          <a:spcPct val="105000"/>
+                        </a:lnSpc>
+                        <a:spcBef>
+                          <a:spcPts val="0"/>
+                        </a:spcBef>
+                        <a:spcAft>
+                          <a:spcPts val="0"/>
+                        </a:spcAft>
+                      </a:pPr>
+                      <a:r>
+                        <a:rPr sz="1500" b="0">
+                          <a:solidFill>
+                            <a:srgbClr val="333333"/>
+                          </a:solidFill>
+                          <a:latin typeface="Arial"/>
+                          <a:ea typeface="微软雅黑"/>
+                          <a:cs typeface="Arial"/>
+                        </a:rPr>
+                        <a:t>Adv Sci [47]</a:t>
+                      </a:r>
+                    </a:p>
+                  </a:txBody>
+                  <a:tcPr marT="27432" marB="27432">
+                    <a:solidFill>
+                      <a:srgbClr val="FFFFFF"/>
+                    </a:solidFill>
+                  </a:tcPr>
+                </a:tc>
+              </a:tr>
+              <a:tr h="384048">
+                <a:tc>
+                  <a:txBody>
+                    <a:bodyPr/>
+                    <a:lstStyle/>
+                    <a:p>
+                      <a:pPr algn="l">
+                        <a:lnSpc>
+                          <a:spcPct val="105000"/>
+                        </a:lnSpc>
+                        <a:spcBef>
+                          <a:spcPts val="0"/>
+                        </a:spcBef>
+                        <a:spcAft>
+                          <a:spcPts val="0"/>
+                        </a:spcAft>
+                      </a:pPr>
+                      <a:r>
+                        <a:rPr sz="1500" b="0">
+                          <a:solidFill>
+                            <a:srgbClr val="111111"/>
+                          </a:solidFill>
+                          <a:latin typeface="Arial"/>
+                          <a:ea typeface="微软雅黑"/>
+                          <a:cs typeface="Arial"/>
+                        </a:rPr>
+                        <a:t>Wang 等 2018</a:t>
+                      </a:r>
+                    </a:p>
+                  </a:txBody>
+                  <a:tcPr marT="27432" marB="27432">
+                    <a:solidFill>
+                      <a:srgbClr val="FFFFFF"/>
+                    </a:solidFill>
+                  </a:tcPr>
+                </a:tc>
+                <a:tc>
+                  <a:txBody>
+                    <a:bodyPr/>
+                    <a:lstStyle/>
+                    <a:p>
+                      <a:pPr algn="l">
+                        <a:lnSpc>
+                          <a:spcPct val="105000"/>
+                        </a:lnSpc>
+                        <a:spcBef>
+                          <a:spcPts val="0"/>
+                        </a:spcBef>
+                        <a:spcAft>
+                          <a:spcPts val="0"/>
+                        </a:spcAft>
+                      </a:pPr>
+                      <a:r>
+                        <a:rPr sz="1500" b="0">
+                          <a:solidFill>
+                            <a:srgbClr val="333333"/>
+                          </a:solidFill>
+                          <a:latin typeface="Arial"/>
+                          <a:ea typeface="微软雅黑"/>
+                          <a:cs typeface="Arial"/>
+                        </a:rPr>
+                        <a:t>LPS 内毒素血症诱导 Aβ 斑块与 p-tau</a:t>
+                      </a:r>
+                    </a:p>
+                  </a:txBody>
+                  <a:tcPr marT="27432" marB="27432">
+                    <a:solidFill>
+                      <a:srgbClr val="FFFFFF"/>
+                    </a:solidFill>
+                  </a:tcPr>
+                </a:tc>
+                <a:tc>
+                  <a:txBody>
+                    <a:bodyPr/>
+                    <a:lstStyle/>
+                    <a:p>
+                      <a:pPr algn="l">
+                        <a:lnSpc>
+                          <a:spcPct val="105000"/>
+                        </a:lnSpc>
+                        <a:spcBef>
+                          <a:spcPts val="0"/>
+                        </a:spcBef>
+                        <a:spcAft>
+                          <a:spcPts val="0"/>
+                        </a:spcAft>
+                      </a:pPr>
+                      <a:r>
+                        <a:rPr sz="1500" b="0">
+                          <a:solidFill>
+                            <a:srgbClr val="333333"/>
+                          </a:solidFill>
+                          <a:latin typeface="Arial"/>
+                          <a:ea typeface="微软雅黑"/>
+                          <a:cs typeface="Arial"/>
+                        </a:rPr>
+                        <a:t>Am J Nucl Med Mol Imaging [50]</a:t>
+                      </a:r>
+                    </a:p>
+                  </a:txBody>
+                  <a:tcPr marT="27432" marB="27432">
+                    <a:solidFill>
+                      <a:srgbClr val="FFFFFF"/>
+                    </a:solidFill>
+                  </a:tcPr>
+                </a:tc>
+              </a:tr>
+              <a:tr h="384048">
+                <a:tc>
+                  <a:txBody>
+                    <a:bodyPr/>
+                    <a:lstStyle/>
+                    <a:p>
+                      <a:pPr algn="l">
+                        <a:lnSpc>
+                          <a:spcPct val="105000"/>
+                        </a:lnSpc>
+                        <a:spcBef>
+                          <a:spcPts val="0"/>
+                        </a:spcBef>
+                        <a:spcAft>
+                          <a:spcPts val="0"/>
+                        </a:spcAft>
+                      </a:pPr>
+                      <a:r>
+                        <a:rPr sz="1500" b="0">
+                          <a:solidFill>
+                            <a:srgbClr val="111111"/>
+                          </a:solidFill>
+                          <a:latin typeface="Arial"/>
+                          <a:ea typeface="微软雅黑"/>
+                          <a:cs typeface="Arial"/>
+                        </a:rPr>
+                        <a:t>Wang 等 2025</a:t>
+                      </a:r>
+                    </a:p>
+                  </a:txBody>
+                  <a:tcPr marT="27432" marB="27432">
+                    <a:solidFill>
+                      <a:srgbClr val="FFFFFF"/>
+                    </a:solidFill>
+                  </a:tcPr>
+                </a:tc>
+                <a:tc>
+                  <a:txBody>
+                    <a:bodyPr/>
+                    <a:lstStyle/>
+                    <a:p>
+                      <a:pPr algn="l">
+                        <a:lnSpc>
+                          <a:spcPct val="105000"/>
+                        </a:lnSpc>
+                        <a:spcBef>
+                          <a:spcPts val="0"/>
+                        </a:spcBef>
+                        <a:spcAft>
+                          <a:spcPts val="0"/>
+                        </a:spcAft>
+                      </a:pPr>
+                      <a:r>
+                        <a:rPr sz="1500" b="0">
+                          <a:solidFill>
+                            <a:srgbClr val="333333"/>
+                          </a:solidFill>
+                          <a:latin typeface="Arial"/>
+                          <a:ea typeface="微软雅黑"/>
+                          <a:cs typeface="Arial"/>
+                        </a:rPr>
+                        <a:t>LL-37 与 Aβ40 形成异源团簇，产物更毒</a:t>
+                      </a:r>
+                    </a:p>
+                  </a:txBody>
+                  <a:tcPr marT="27432" marB="27432">
+                    <a:solidFill>
+                      <a:srgbClr val="FFFFFF"/>
+                    </a:solidFill>
+                  </a:tcPr>
+                </a:tc>
+                <a:tc>
+                  <a:txBody>
+                    <a:bodyPr/>
+                    <a:lstStyle/>
+                    <a:p>
+                      <a:pPr algn="l">
+                        <a:lnSpc>
+                          <a:spcPct val="105000"/>
+                        </a:lnSpc>
+                        <a:spcBef>
+                          <a:spcPts val="0"/>
+                        </a:spcBef>
+                        <a:spcAft>
+                          <a:spcPts val="0"/>
+                        </a:spcAft>
+                      </a:pPr>
+                      <a:r>
+                        <a:rPr sz="1500" b="0">
+                          <a:solidFill>
+                            <a:srgbClr val="333333"/>
+                          </a:solidFill>
+                          <a:latin typeface="Arial"/>
+                          <a:ea typeface="微软雅黑"/>
+                          <a:cs typeface="Arial"/>
+                        </a:rPr>
+                        <a:t>Angew Chem Int Ed [53]</a:t>
                       </a:r>
                     </a:p>
                   </a:txBody>

--- a/deliverable/中期答辩_最终版.pptx
+++ b/deliverable/中期答辩_最终版.pptx
@@ -595,7 +595,7 @@
           <a:lstStyle/>
           <a:p>
             <a:r>
-              <a:t>在序列去冗余的基础上，引入宏蛋白组的表达证据做二次去重，只保留在蛋白层面真实存在、可检出的抗菌肽；再按组内共有、组间特比较，得到健康人群特有与各疾病阶段特有的抗菌肽清单。这一步已完成。</a:t>
+              <a:t>在序列去冗余的基础上，引入宏蛋白组的表达证据做二次去重，只保留在蛋白层面真实存在、可检出的抗菌肽；再按组内共有、组间特比较，得到 AD 组特有（AD 特异性）的抗菌肽清单，这一步已完成。</a:t>
             </a:r>
           </a:p>
         </p:txBody>
@@ -665,7 +665,7 @@
           <a:lstStyle/>
           <a:p>
             <a:r>
-              <a:t>机制关联参照乙酰胆碱酯酶—β-淀粉样肽复合物分子模拟研究的思路，方向按致病方向设定：微生物来源的淀粉样蛋白与内毒素已有先例——FapC 与 CsgA 种子加速 Aβ 纤维化并在动物模型中加重病理，LPS 缩短成核滞后期并诱导斑块与 p-tau，LL-37 与 Aβ 形成异源团簇、生成更毒的聚集体。因此分析的是候选肽是否促进 Aβ 成核与聚集、是否经 AChE 外周阴离子位点推动成核、是否经免疫与炎症通路放大神经炎症，而不是去证明它抑制 AD；结论定位为线索发现与优先序。</a:t>
+              <a:t>机制关联参照乙酰胆碱酯酶—β-淀粉样肽复合物分子模拟研究的思路，方向按致病方向设定：微生物来源的淀粉样蛋白与内毒素已有先例——FapC 与 CsgA 种子加速 Aβ 纤维化并在动物模型中加重病理，LPS 缩短成核滞后期并诱导斑块与 p-tau，LL-37 与 Aβ 形成异源团簇、生成更毒的聚集体。因此分析的是 AD 特异性特有肽是否促进 Aβ 成核与聚集、是否经 AChE 外周阴离子位点推动成核、是否经免疫与炎症通路放大神经炎症，而不是去证明它抑制 AD；结论定位为线索发现。</a:t>
             </a:r>
           </a:p>
         </p:txBody>
@@ -1155,7 +1155,7 @@
           <a:lstStyle/>
           <a:p>
             <a:r>
-              <a:t>这页把抗菌肽与 AD 的关联拆成七环，并标出每一环的证据强度：蓝色是已有实验或临床证据，绿色是计算方法能给出候选与优先序的部分，橙色是本课题要回答或需要验证的部分。第六环要特别说清楚：本课题验证的是致病方向——筛选出的候选抗菌肽是否像 FapC、CsgA 与 LL-37 那样推动 Aβ 成核聚集与神经炎症，而不是去证明它抑制 AD。老师问任何一环，都能说清这一环目前的证据到什么程度。</a:t>
+              <a:t>这页把抗菌肽与 AD 的关联拆成七环，并标出每一环的证据强度：蓝色是已有实验或临床证据，绿色是计算与文献比对能给出关联线索的部分，橙色是本课题要回答或需要验证的部分。第六环要特别说清楚：本课题验证的是致病方向——筛选出的候选抗菌肽是否像 FapC、CsgA 与 LL-37 那样推动 Aβ 成核聚集与神经炎症，而不是去证明它抑制 AD。老师问任何一环，都能说清这一环目前的证据到什么程度。</a:t>
             </a:r>
           </a:p>
         </p:txBody>
@@ -1365,7 +1365,7 @@
           <a:lstStyle/>
           <a:p>
             <a:r>
-              <a:t>机制落点参照 AChE–Aβ 复合物的分子动力学研究：Aβ 对接进 PAS 后，复合物在 1 微秒模拟中保持稳定，主要停留区段是 344—361，该区段紧邻 PAS 但不受双位点抑制剂的位阻。这一段界面既是 Aβ 成核的场所，也是候选抗菌肽最可能介入的位置。与按“抑制聚集”提问不同，本课题的动力学按致病方向设计——检验候选肽是否促进成核与聚集，这样设计的依据是微生物来源的淀粉样蛋白与内毒素已有直接先例：FapC 与 CsgA 种子催化 Aβ 纤维化并在动物模型中加重病理 [47][48]，LPS 缩短滞后期、其内毒素血症模型中 7—9 天出现 Aβ 斑块与 p-tau [49][50]，LL-37 与 Aβ40 形成异源团簇、生成更毒的聚集体并经 CLIC1 造成小鼠与猴模型的 AD 样病理 [6][53]。由此提出三个假设：H1 结合 PAS 与 344—361 促进成核与聚集、H2 结合 Aβ 生成区加速纤维化或推向更毒寡聚体、H3 在膜与小胶质水平放大炎症信号；验证路径是先用对接与动力学给出致病方向的优先序，再用 ThT 聚集动力学、电镜形态与细胞毒性实验给证据。</a:t>
+              <a:t>机制落点参照 AChE–Aβ 复合物的分子动力学研究：Aβ 对接进 PAS 后，复合物在 1 微秒模拟中保持稳定，主要停留区段是 344—361，该区段紧邻 PAS 但不受双位点抑制剂的位阻。这一段界面既是 Aβ 成核的场所，也是 AD 特异性特有肽最可能起作用的位置。与按“抑制聚集”提问不同，本课题的动力学按致病方向设计——检验 AD 特有肽是否促进成核与聚集，这样设计的依据是微生物来源的淀粉样蛋白与内毒素已有直接先例：FapC 与 CsgA 种子催化 Aβ 纤维化并在动物模型中加重病理 [47][48]，LPS 缩短滞后期、其内毒素血症模型中 7—9 天出现 Aβ 斑块与 p-tau [49][50]，LL-37 与 Aβ40 形成异源团簇、生成更毒的聚集体并经 CLIC1 造成小鼠与猴模型的 AD 样病理 [6][53]。由此提出三个假设：H1 结合 PAS 与 344—361 促进成核与聚集、H2 结合 Aβ 生成区加速纤维化或推向更毒寡聚体、H3 在膜与小胶质水平放大炎症信号；验证路径是先用对接与动力学判断关联方向（是否促进成核与聚集、是否把产物推向更毒寡聚体），再用 ThT 聚集动力学、电镜形态与细胞毒性实验给证据。</a:t>
             </a:r>
           </a:p>
         </p:txBody>
@@ -1855,7 +1855,7 @@
           <a:lstStyle/>
           <a:p>
             <a:r>
-              <a:t>这页说明整体流程：从测序数据到候选抗菌肽清单，共十二步，输入输出都可追溯。工具链是 fastp 与 KneadData 做质控去宿主，MEGAHIT 组装，MetaBAT2、MaxBin2 与 CONCOCT 多算法联合分箱后 metaWRAP 提纯，dRep 按 95% ANI 去冗余得到参考基因组集，EMBOSS getorf 预测 sORF 并做序列级去冗余，Attention / LSTM / BERT 三模型一致阳性才纳入候选，CoverM 定量并做 CLR 变换，用 Kruskal-Wallis 与 Mann-Whitney U 做组间检验，再用宏蛋白组表达证据二次去重。前九步已经在中期前完成，最后三步正在推进——机制关联分析、抑菌实验验证与结果整理。</a:t>
+              <a:t>这页说明整体流程：从测序数据到候选抗菌肽清单，共十二步，输入输出都可追溯。工具链是 fastp 与 KneadData 做质控去宿主，MEGAHIT 组装，MetaBAT2、MaxBin2 与 CONCOCT 三个分箱算法分别分箱，再用 metaWRAP 提纯，dRep 按 95% ANI 去冗余得到参考基因组集，EMBOSS getorf 预测 sORF 并做序列级去冗余，Attention / LSTM / BERT 三模型一致阳性才纳入候选，CoverM 定量并做 CLR 变换，用 Kruskal-Wallis 与 Mann-Whitney U 做组间检验，再用宏蛋白组表达证据二次去重。前九步已经在中期前完成，最后三步正在推进——机制关联分析、抑菌实验验证与结果整理。</a:t>
             </a:r>
           </a:p>
         </p:txBody>
@@ -5667,7 +5667,7 @@
                 <a:ea typeface="微软雅黑"/>
                 <a:cs typeface="Arial"/>
               </a:rPr>
-              <a:t>宏蛋白组表达证据二次去重后，得到健康人与各阶段特有抗菌肽</a:t>
+              <a:t>宏蛋白组表达证据二次去重后，得到 AD 特异性特有抗菌肽</a:t>
             </a:r>
           </a:p>
         </p:txBody>
@@ -5782,7 +5782,7 @@
                 <a:ea typeface="微软雅黑"/>
                 <a:cs typeface="Arial"/>
               </a:rPr>
-              <a:t>序列层面去冗余解决重复；宏蛋白组表达证据解决“有预测、无表达”的假阳性。二次去重后按组内共有、组间特比较，得到健康人群特有与各疾病阶段特有的抗菌肽清单。</a:t>
+              <a:t>序列层面去冗余解决重复；宏蛋白组表达证据解决“有预测、无表达”的假阳性。二次去重后按组内共有、组间特比较，得到 AD 组特有（AD 特异性）的抗菌肽清单，并保留其随认知阶段的变化。</a:t>
             </a:r>
           </a:p>
         </p:txBody>
@@ -5941,7 +5941,7 @@
                 <a:ea typeface="微软雅黑"/>
                 <a:cs typeface="Arial"/>
               </a:rPr>
-              <a:t>机制关联从 Aβ、AChE 与炎症通路三个方向展开</a:t>
+              <a:t>AD 特有肽与 AD 的关联：Aβ、AChE 与炎症通路</a:t>
             </a:r>
           </a:p>
         </p:txBody>
@@ -6080,7 +6080,7 @@
                 <a:ea typeface="微软雅黑"/>
                 <a:cs typeface="Arial"/>
               </a:rPr>
-              <a:t>借鉴乙酰胆碱酯酶—β-淀粉样肽复合物分子模拟研究的思路，按致病方向考察：候选肽是否促进 Aβ 成核与聚集、是否经 AChE 外周阴离子位点推动成核、是否经免疫与炎症通路放大神经炎症；输出优先序，定位为线索发现。</a:t>
+              <a:t>借鉴乙酰胆碱酯酶—β-淀粉样肽复合物分子模拟研究的思路，按致病方向考察 AD 特异性特有肽：是否促进 Aβ 成核与聚集、是否经 AChE 外周阴离子位点推动成核、是否经免疫与炎症通路放大神经炎症；结论定位为线索发现。</a:t>
             </a:r>
           </a:p>
         </p:txBody>
@@ -8439,7 +8439,7 @@
                 <a:ea typeface="微软雅黑"/>
                 <a:cs typeface="Arial"/>
               </a:rPr>
-              <a:t>机制关联分析：完成特有抗菌肽与 Aβ 聚集、AChE 结合及炎症通路的关联分析，形成候选肽清单。</a:t>
+              <a:t>机制关联分析：完成 AD 特异性特有抗菌肽与 Aβ 聚集、AChE 结合及炎症通路的关联分析。</a:t>
             </a:r>
           </a:p>
           <a:p>
@@ -8487,7 +8487,7 @@
                 <a:ea typeface="微软雅黑"/>
                 <a:cs typeface="Arial"/>
               </a:rPr>
-              <a:t>结果整理与论文撰写：汇总候选抗菌肽、特有肽与验证结果，完成学位论文与投稿论文准备。</a:t>
+              <a:t>结果整理与论文撰写：汇总 AD 特有肽、机制关联与验证结果，完成学位论文与投稿论文准备。</a:t>
             </a:r>
           </a:p>
         </p:txBody>
@@ -8737,7 +8737,7 @@
                 <a:ea typeface="微软雅黑"/>
                 <a:cs typeface="Arial"/>
               </a:rPr>
-              <a:t>预期成果：一套可复用的分析流程、健康人与各阶段特有的候选抗菌肽清单、机制关联与抑菌活性结果，以及以第一作者投稿的 SCI 论文与学位论文。</a:t>
+              <a:t>预期成果：一套可复用的分析流程、AD 特异性特有的候选抗菌肽清单、AD 特有肽与 AD 关联的分析结果、以及以第一作者投稿的 SCI 论文与学位论文。</a:t>
             </a:r>
           </a:p>
           <a:p>
@@ -9009,8 +9009,8 @@
         </p:blipFill>
         <p:spPr>
           <a:xfrm>
-            <a:off x="1697813" y="1188720"/>
-            <a:ext cx="8793325" cy="3767328"/>
+            <a:off x="1606668" y="1188720"/>
+            <a:ext cx="8975615" cy="3767328"/>
           </a:xfrm>
           <a:prstGeom prst="rect">
             <a:avLst/>
@@ -9059,7 +9059,7 @@
                 <a:ea typeface="微软雅黑"/>
                 <a:cs typeface="Arial"/>
               </a:rPr>
-              <a:t>① AD 与感染相关、② 炎症驱动抗菌肽与 Aβ 生成、③ Aβ 本身即抗菌肽；④ 抗菌活性可计算预测、⑤ 特异抗菌肽随阶段变化、⑥ 致病方向：促进 Aβ 聚集；⑦ 为什么 AD 更多与机制落点是本课题要回答的部分。</a:t>
+              <a:t>① AD 与感染相关、② 炎症驱动抗菌肽与 Aβ 生成、③ Aβ 本身即抗菌肽；④ 抗菌活性可计算预测、⑤ AD 特异性特有肽随阶段变化、⑥ 致病方向：促进 Aβ 聚集；⑦ 为什么 AD 更多与 AD 特有肽与 AD 的关联是本课题要回答的部分。</a:t>
             </a:r>
           </a:p>
         </p:txBody>
@@ -10462,7 +10462,7 @@
                 <a:ea typeface="微软雅黑"/>
                 <a:cs typeface="Arial"/>
               </a:rPr>
-              <a:t>分子机制（一）：动力学如何验证候选肽的致病方向</a:t>
+              <a:t>分子机制（一）：动力学如何检验 AD 特有肽与 AD 的关联</a:t>
             </a:r>
           </a:p>
         </p:txBody>
@@ -10577,7 +10577,7 @@
                 <a:ea typeface="微软雅黑"/>
                 <a:cs typeface="Arial"/>
               </a:rPr>
-              <a:t>PAS 是 Aβ 的成核界面：1 μs 模拟中复合物稳定，Aβ 主要停留于 344—361 区段 [31]；本课题据此检验候选肽在这一界面是促进成核与聚集，还是把产物推向更毒的寡聚体。</a:t>
+              <a:t>PAS 是 Aβ 的成核界面：1 μs 模拟中复合物稳定，Aβ 主要停留于 344—361 区段 [31]；本课题据此检验 AD 特异性特有肽在这一界面是促进成核与聚集，还是把产物推向更毒的寡聚体。</a:t>
             </a:r>
           </a:p>
         </p:txBody>
@@ -10851,7 +10851,7 @@
                 <a:ea typeface="微软雅黑"/>
                 <a:cs typeface="Arial"/>
               </a:rPr>
-              <a:t>抗菌肽与 Aβ 结构兼容，可交叉成核 [36][37]；微生物来源的 FapC 与 CsgA 是先例：种子加速 Aβ 纤维化并在动物模型中加重病理 [47][48]；本课题按致病方向检验候选肽。</a:t>
+              <a:t>抗菌肽与 Aβ 结构兼容，可交叉成核 [36][37]；微生物来源的 FapC 与 CsgA 是先例：种子加速 Aβ 纤维化并在动物模型中加重病理 [47][48]；本课题按致病方向检验 AD 特有肽。</a:t>
             </a:r>
           </a:p>
         </p:txBody>
@@ -11677,7 +11677,7 @@
                           <a:ea typeface="微软雅黑"/>
                           <a:cs typeface="Arial"/>
                         </a:rPr>
-                        <a:t>④ AD 组特有肽</a:t>
+                        <a:t>④ AD 特异性特有肽</a:t>
                       </a:r>
                     </a:p>
                   </a:txBody>
@@ -11712,7 +11712,7 @@
                           <a:ea typeface="微软雅黑"/>
                           <a:cs typeface="Arial"/>
                         </a:rPr>
-                        <a:t>菌群随认知阶段梯度变化，阶段特有肽有依据</a:t>
+                        <a:t>AD 组特异的菌种与功能特征有据；特有肽判定需表达证据</a:t>
                       </a:r>
                     </a:p>
                   </a:txBody>
@@ -11782,7 +11782,7 @@
                           <a:ea typeface="微软雅黑"/>
                           <a:cs typeface="Arial"/>
                         </a:rPr>
-                        <a:t>[26][28][30]</a:t>
+                        <a:t>[26][28][30][59]</a:t>
                       </a:r>
                     </a:p>
                   </a:txBody>
@@ -14338,7 +14338,7 @@
                 <a:ea typeface="微软雅黑"/>
                 <a:cs typeface="Arial"/>
               </a:rPr>
-              <a:t>确认事实：数据资源、短肽库、三模型共识预测、分阶段差异分析与特有抗菌肽筛选均已完成。</a:t>
+              <a:t>确认事实：数据资源、短肽库、三模型共识预测、分阶段差异分析与 AD 特异性特有抗菌肽筛选均已完成。</a:t>
             </a:r>
           </a:p>
           <a:p>
@@ -14775,7 +14775,7 @@
                 <a:ea typeface="微软雅黑"/>
                 <a:cs typeface="Arial"/>
               </a:rPr>
-              <a:t>统计与表达层：按认知阶段比较差异，并以宏蛋白组表达证据二次去重，筛选健康人群特有与各阶段特有抗菌肽。</a:t>
+              <a:t>统计与表达层：按认知阶段比较差异，再以宏蛋白组表达证据二次去重，筛出 AD 特异性特有抗菌肽。</a:t>
             </a:r>
           </a:p>
           <a:p>
@@ -14799,7 +14799,7 @@
                 <a:ea typeface="微软雅黑"/>
                 <a:cs typeface="Arial"/>
               </a:rPr>
-              <a:t>功能层：对特有抗菌肽开展发病机制关联分析与抑菌实验验证。</a:t>
+              <a:t>功能层：考察这些 AD 特有肽与 AD 的关联，并做抑菌实验验证。</a:t>
             </a:r>
           </a:p>
         </p:txBody>
@@ -16394,8 +16394,8 @@
                 <a:cs typeface="Arial"/>
               </a:rPr>
               <a:t>MEGAHIT 组装
-MetaBAT2 分箱
-CONCOCT 分箱</a:t>
+MetaBAT2 · MaxBin2
+· CONCOCT 分箱</a:t>
             </a:r>
           </a:p>
         </p:txBody>
@@ -17694,7 +17694,7 @@
                 <a:ea typeface="微软雅黑"/>
                 <a:cs typeface="Arial"/>
               </a:rPr>
-              <a:t>特有抗菌肽</a:t>
+              <a:t>AD 特有抗菌肽</a:t>
             </a:r>
           </a:p>
           <a:p>
@@ -17718,8 +17718,8 @@
                 <a:ea typeface="微软雅黑"/>
                 <a:cs typeface="Arial"/>
               </a:rPr>
-              <a:t>健康人群特有肽
-各阶段特有肽</a:t>
+              <a:t>AD 组特有（特异性）
+各阶段 AD 特有肽</a:t>
             </a:r>
           </a:p>
         </p:txBody>
@@ -17883,7 +17883,7 @@
                 <a:ea typeface="微软雅黑"/>
                 <a:cs typeface="Arial"/>
               </a:rPr>
-              <a:t>机制关联分析</a:t>
+              <a:t>AD 特有肽与 AD 关联</a:t>
             </a:r>
           </a:p>
           <a:p>
@@ -17908,7 +17908,7 @@
                 <a:cs typeface="Arial"/>
               </a:rPr>
               <a:t>分子对接 + 动力学
-给出候选优先序</a:t>
+文献比对与机制判定</a:t>
             </a:r>
           </a:p>
         </p:txBody>
